--- a/Supp Data/Fig 5.pptx
+++ b/Supp Data/Fig 5.pptx
@@ -2,15 +2,15 @@
 <file path=ppt/presentation.xml><?xml version="1.0" encoding="utf-8"?>
 <p:presentation xmlns:a="http://schemas.openxmlformats.org/drawingml/2006/main" xmlns:r="http://schemas.openxmlformats.org/officeDocument/2006/relationships" xmlns:p="http://schemas.openxmlformats.org/presentationml/2006/main" saveSubsetFonts="1" autoCompressPictures="0">
   <p:sldMasterIdLst>
-    <p:sldMasterId id="2147483816" r:id="rId1"/>
+    <p:sldMasterId id="2147484140" r:id="rId1"/>
   </p:sldMasterIdLst>
   <p:notesMasterIdLst>
     <p:notesMasterId r:id="rId3"/>
   </p:notesMasterIdLst>
   <p:sldIdLst>
-    <p:sldId id="282" r:id="rId2"/>
+    <p:sldId id="280" r:id="rId2"/>
   </p:sldIdLst>
-  <p:sldSz cx="1295400" cy="914400"/>
+  <p:sldSz cx="2214563" cy="1450975"/>
   <p:notesSz cx="6858000" cy="9144000"/>
   <p:defaultTextStyle>
     <a:defPPr>
@@ -197,7 +197,7 @@
           <a:p>
             <a:fld id="{810CFC23-F338-EB41-8653-4316F1EF48B5}" type="datetimeFigureOut">
               <a:rPr lang="en-DE" smtClean="0"/>
-              <a:t>13.05.26</a:t>
+              <a:t>20.05.26</a:t>
             </a:fld>
             <a:endParaRPr lang="en-DE"/>
           </a:p>
@@ -215,8 +215,8 @@
         </p:nvSpPr>
         <p:spPr>
           <a:xfrm>
-            <a:off x="1243013" y="1143000"/>
-            <a:ext cx="4371975" cy="3086100"/>
+            <a:off x="1073150" y="1143000"/>
+            <a:ext cx="4711700" cy="3086100"/>
           </a:xfrm>
           <a:prstGeom prst="rect">
             <a:avLst/>
@@ -371,8 +371,8 @@
   </p:cSld>
   <p:clrMap bg1="lt1" tx1="dk1" bg2="lt2" tx2="dk2" accent1="accent1" accent2="accent2" accent3="accent3" accent4="accent4" accent5="accent5" accent6="accent6" hlink="hlink" folHlink="folHlink"/>
   <p:notesStyle>
-    <a:lvl1pPr marL="0" algn="l" defTabSz="141687" rtl="0" eaLnBrk="1" latinLnBrk="0" hangingPunct="1">
-      <a:defRPr sz="186" kern="1200">
+    <a:lvl1pPr marL="0" algn="l" defTabSz="178553" rtl="0" eaLnBrk="1" latinLnBrk="0" hangingPunct="1">
+      <a:defRPr sz="236" kern="1200">
         <a:solidFill>
           <a:schemeClr val="tx1"/>
         </a:solidFill>
@@ -381,8 +381,8 @@
         <a:cs typeface="+mn-cs"/>
       </a:defRPr>
     </a:lvl1pPr>
-    <a:lvl2pPr marL="70843" algn="l" defTabSz="141687" rtl="0" eaLnBrk="1" latinLnBrk="0" hangingPunct="1">
-      <a:defRPr sz="186" kern="1200">
+    <a:lvl2pPr marL="89277" algn="l" defTabSz="178553" rtl="0" eaLnBrk="1" latinLnBrk="0" hangingPunct="1">
+      <a:defRPr sz="236" kern="1200">
         <a:solidFill>
           <a:schemeClr val="tx1"/>
         </a:solidFill>
@@ -391,8 +391,8 @@
         <a:cs typeface="+mn-cs"/>
       </a:defRPr>
     </a:lvl2pPr>
-    <a:lvl3pPr marL="141687" algn="l" defTabSz="141687" rtl="0" eaLnBrk="1" latinLnBrk="0" hangingPunct="1">
-      <a:defRPr sz="186" kern="1200">
+    <a:lvl3pPr marL="178553" algn="l" defTabSz="178553" rtl="0" eaLnBrk="1" latinLnBrk="0" hangingPunct="1">
+      <a:defRPr sz="236" kern="1200">
         <a:solidFill>
           <a:schemeClr val="tx1"/>
         </a:solidFill>
@@ -401,8 +401,8 @@
         <a:cs typeface="+mn-cs"/>
       </a:defRPr>
     </a:lvl3pPr>
-    <a:lvl4pPr marL="212530" algn="l" defTabSz="141687" rtl="0" eaLnBrk="1" latinLnBrk="0" hangingPunct="1">
-      <a:defRPr sz="186" kern="1200">
+    <a:lvl4pPr marL="267830" algn="l" defTabSz="178553" rtl="0" eaLnBrk="1" latinLnBrk="0" hangingPunct="1">
+      <a:defRPr sz="236" kern="1200">
         <a:solidFill>
           <a:schemeClr val="tx1"/>
         </a:solidFill>
@@ -411,8 +411,8 @@
         <a:cs typeface="+mn-cs"/>
       </a:defRPr>
     </a:lvl4pPr>
-    <a:lvl5pPr marL="283373" algn="l" defTabSz="141687" rtl="0" eaLnBrk="1" latinLnBrk="0" hangingPunct="1">
-      <a:defRPr sz="186" kern="1200">
+    <a:lvl5pPr marL="357105" algn="l" defTabSz="178553" rtl="0" eaLnBrk="1" latinLnBrk="0" hangingPunct="1">
+      <a:defRPr sz="236" kern="1200">
         <a:solidFill>
           <a:schemeClr val="tx1"/>
         </a:solidFill>
@@ -421,8 +421,8 @@
         <a:cs typeface="+mn-cs"/>
       </a:defRPr>
     </a:lvl5pPr>
-    <a:lvl6pPr marL="354217" algn="l" defTabSz="141687" rtl="0" eaLnBrk="1" latinLnBrk="0" hangingPunct="1">
-      <a:defRPr sz="186" kern="1200">
+    <a:lvl6pPr marL="446382" algn="l" defTabSz="178553" rtl="0" eaLnBrk="1" latinLnBrk="0" hangingPunct="1">
+      <a:defRPr sz="236" kern="1200">
         <a:solidFill>
           <a:schemeClr val="tx1"/>
         </a:solidFill>
@@ -431,8 +431,8 @@
         <a:cs typeface="+mn-cs"/>
       </a:defRPr>
     </a:lvl6pPr>
-    <a:lvl7pPr marL="425060" algn="l" defTabSz="141687" rtl="0" eaLnBrk="1" latinLnBrk="0" hangingPunct="1">
-      <a:defRPr sz="186" kern="1200">
+    <a:lvl7pPr marL="535657" algn="l" defTabSz="178553" rtl="0" eaLnBrk="1" latinLnBrk="0" hangingPunct="1">
+      <a:defRPr sz="236" kern="1200">
         <a:solidFill>
           <a:schemeClr val="tx1"/>
         </a:solidFill>
@@ -441,8 +441,8 @@
         <a:cs typeface="+mn-cs"/>
       </a:defRPr>
     </a:lvl7pPr>
-    <a:lvl8pPr marL="495904" algn="l" defTabSz="141687" rtl="0" eaLnBrk="1" latinLnBrk="0" hangingPunct="1">
-      <a:defRPr sz="186" kern="1200">
+    <a:lvl8pPr marL="624936" algn="l" defTabSz="178553" rtl="0" eaLnBrk="1" latinLnBrk="0" hangingPunct="1">
+      <a:defRPr sz="236" kern="1200">
         <a:solidFill>
           <a:schemeClr val="tx1"/>
         </a:solidFill>
@@ -451,8 +451,8 @@
         <a:cs typeface="+mn-cs"/>
       </a:defRPr>
     </a:lvl8pPr>
-    <a:lvl9pPr marL="566747" algn="l" defTabSz="141687" rtl="0" eaLnBrk="1" latinLnBrk="0" hangingPunct="1">
-      <a:defRPr sz="186" kern="1200">
+    <a:lvl9pPr marL="714211" algn="l" defTabSz="178553" rtl="0" eaLnBrk="1" latinLnBrk="0" hangingPunct="1">
+      <a:defRPr sz="236" kern="1200">
         <a:solidFill>
           <a:schemeClr val="tx1"/>
         </a:solidFill>
@@ -463,6 +463,829 @@
     </a:lvl9pPr>
   </p:notesStyle>
 </p:notesMaster>
+</file>
+
+<file path=ppt/notesSlides/notesSlide1.xml><?xml version="1.0" encoding="utf-8"?>
+<p:notes xmlns:a="http://schemas.openxmlformats.org/drawingml/2006/main" xmlns:r="http://schemas.openxmlformats.org/officeDocument/2006/relationships" xmlns:p="http://schemas.openxmlformats.org/presentationml/2006/main">
+  <p:cSld>
+    <p:spTree>
+      <p:nvGrpSpPr>
+        <p:cNvPr id="1" name=""/>
+        <p:cNvGrpSpPr/>
+        <p:nvPr/>
+      </p:nvGrpSpPr>
+      <p:grpSpPr>
+        <a:xfrm>
+          <a:off x="0" y="0"/>
+          <a:ext cx="0" cy="0"/>
+          <a:chOff x="0" y="0"/>
+          <a:chExt cx="0" cy="0"/>
+        </a:xfrm>
+      </p:grpSpPr>
+      <p:sp>
+        <p:nvSpPr>
+          <p:cNvPr id="2" name="Slide Image Placeholder 1"/>
+          <p:cNvSpPr>
+            <a:spLocks noGrp="1" noRot="1" noChangeAspect="1"/>
+          </p:cNvSpPr>
+          <p:nvPr>
+            <p:ph type="sldImg"/>
+          </p:nvPr>
+        </p:nvSpPr>
+        <p:spPr>
+          <a:xfrm>
+            <a:off x="1073150" y="1143000"/>
+            <a:ext cx="4711700" cy="3086100"/>
+          </a:xfrm>
+        </p:spPr>
+      </p:sp>
+      <p:sp>
+        <p:nvSpPr>
+          <p:cNvPr id="3" name="Notes Placeholder 2"/>
+          <p:cNvSpPr>
+            <a:spLocks noGrp="1"/>
+          </p:cNvSpPr>
+          <p:nvPr>
+            <p:ph type="body" idx="1"/>
+          </p:nvPr>
+        </p:nvSpPr>
+        <p:spPr/>
+        <p:txBody>
+          <a:bodyPr/>
+          <a:lstStyle/>
+          <a:p>
+            <a:r>
+              <a:rPr lang="en-DE" dirty="0"/>
+              <a:t>Main plot 1)</a:t>
+            </a:r>
+          </a:p>
+          <a:p>
+            <a:endParaRPr lang="en-DE" dirty="0"/>
+          </a:p>
+          <a:p>
+            <a:r>
+              <a:rPr lang="en-DE" dirty="0"/>
+              <a:t>From CS ref,</a:t>
+            </a:r>
+          </a:p>
+          <a:p>
+            <a:endParaRPr lang="en-DE" dirty="0"/>
+          </a:p>
+          <a:p>
+            <a:r>
+              <a:rPr lang="en-GB" dirty="0"/>
+              <a:t>T</a:t>
+            </a:r>
+            <a:r>
+              <a:rPr lang="en-DE" dirty="0"/>
+              <a:t>op left: transcriptome PCA</a:t>
+            </a:r>
+          </a:p>
+          <a:p>
+            <a:pPr marL="0" marR="0" lvl="0" indent="0" algn="l" defTabSz="914400" rtl="0" eaLnBrk="1" fontAlgn="auto" latinLnBrk="0" hangingPunct="1">
+              <a:lnSpc>
+                <a:spcPct val="100000"/>
+              </a:lnSpc>
+              <a:spcBef>
+                <a:spcPts val="0"/>
+              </a:spcBef>
+              <a:spcAft>
+                <a:spcPts val="0"/>
+              </a:spcAft>
+              <a:buClrTx/>
+              <a:buSzTx/>
+              <a:buFontTx/>
+              <a:buNone/>
+              <a:tabLst/>
+              <a:defRPr/>
+            </a:pPr>
+            <a:r>
+              <a:rPr lang="en-GB" dirty="0"/>
+              <a:t>T</a:t>
+            </a:r>
+            <a:r>
+              <a:rPr lang="en-DE" dirty="0"/>
+              <a:t>op right: genotype PCA</a:t>
+            </a:r>
+          </a:p>
+          <a:p>
+            <a:pPr marL="0" marR="0" lvl="0" indent="0" algn="l" defTabSz="914400" rtl="0" eaLnBrk="1" fontAlgn="auto" latinLnBrk="0" hangingPunct="1">
+              <a:lnSpc>
+                <a:spcPct val="100000"/>
+              </a:lnSpc>
+              <a:spcBef>
+                <a:spcPts val="0"/>
+              </a:spcBef>
+              <a:spcAft>
+                <a:spcPts val="0"/>
+              </a:spcAft>
+              <a:buClrTx/>
+              <a:buSzTx/>
+              <a:buFontTx/>
+              <a:buNone/>
+              <a:tabLst/>
+              <a:defRPr/>
+            </a:pPr>
+            <a:r>
+              <a:rPr lang="en-DE" dirty="0"/>
+              <a:t>Bottom left: Venn</a:t>
+            </a:r>
+          </a:p>
+          <a:p>
+            <a:pPr marL="0" marR="0" lvl="0" indent="0" algn="l" defTabSz="914400" rtl="0" eaLnBrk="1" fontAlgn="auto" latinLnBrk="0" hangingPunct="1">
+              <a:lnSpc>
+                <a:spcPct val="100000"/>
+              </a:lnSpc>
+              <a:spcBef>
+                <a:spcPts val="0"/>
+              </a:spcBef>
+              <a:spcAft>
+                <a:spcPts val="0"/>
+              </a:spcAft>
+              <a:buClrTx/>
+              <a:buSzTx/>
+              <a:buFontTx/>
+              <a:buNone/>
+              <a:tabLst/>
+              <a:defRPr/>
+            </a:pPr>
+            <a:r>
+              <a:rPr lang="en-GB" dirty="0"/>
+              <a:t>T</a:t>
+            </a:r>
+            <a:r>
+              <a:rPr lang="en-DE" dirty="0"/>
+              <a:t>op right: Go analysis</a:t>
+            </a:r>
+          </a:p>
+          <a:p>
+            <a:pPr marL="0" marR="0" lvl="0" indent="0" algn="l" defTabSz="914400" rtl="0" eaLnBrk="1" fontAlgn="auto" latinLnBrk="0" hangingPunct="1">
+              <a:lnSpc>
+                <a:spcPct val="100000"/>
+              </a:lnSpc>
+              <a:spcBef>
+                <a:spcPts val="0"/>
+              </a:spcBef>
+              <a:spcAft>
+                <a:spcPts val="0"/>
+              </a:spcAft>
+              <a:buClrTx/>
+              <a:buSzTx/>
+              <a:buFontTx/>
+              <a:buNone/>
+              <a:tabLst/>
+              <a:defRPr/>
+            </a:pPr>
+            <a:endParaRPr lang="en-DE" dirty="0"/>
+          </a:p>
+          <a:p>
+            <a:pPr marL="0" marR="0" lvl="0" indent="0" algn="l" defTabSz="914400" rtl="0" eaLnBrk="1" fontAlgn="auto" latinLnBrk="0" hangingPunct="1">
+              <a:lnSpc>
+                <a:spcPct val="100000"/>
+              </a:lnSpc>
+              <a:spcBef>
+                <a:spcPts val="0"/>
+              </a:spcBef>
+              <a:spcAft>
+                <a:spcPts val="0"/>
+              </a:spcAft>
+              <a:buClrTx/>
+              <a:buSzTx/>
+              <a:buFontTx/>
+              <a:buNone/>
+              <a:tabLst/>
+              <a:defRPr/>
+            </a:pPr>
+            <a:r>
+              <a:rPr lang="en-GB" dirty="0"/>
+              <a:t>I</a:t>
+            </a:r>
+            <a:r>
+              <a:rPr lang="en-DE" dirty="0"/>
+              <a:t>f splitting the venn up, there are the numbers</a:t>
+            </a:r>
+          </a:p>
+          <a:p>
+            <a:pPr marL="0" marR="0" lvl="0" indent="0" algn="l" defTabSz="914400" rtl="0" eaLnBrk="1" fontAlgn="auto" latinLnBrk="0" hangingPunct="1">
+              <a:lnSpc>
+                <a:spcPct val="100000"/>
+              </a:lnSpc>
+              <a:spcBef>
+                <a:spcPts val="0"/>
+              </a:spcBef>
+              <a:spcAft>
+                <a:spcPts val="0"/>
+              </a:spcAft>
+              <a:buClrTx/>
+              <a:buSzTx/>
+              <a:buFontTx/>
+              <a:buNone/>
+              <a:tabLst/>
+              <a:defRPr/>
+            </a:pPr>
+            <a:r>
+              <a:rPr lang="en-GB" dirty="0"/>
+              <a:t>&gt; </a:t>
+            </a:r>
+            <a:r>
+              <a:rPr lang="en-GB" dirty="0" err="1"/>
+              <a:t>nrow</a:t>
+            </a:r>
+            <a:r>
+              <a:rPr lang="en-GB" dirty="0"/>
+              <a:t>(</a:t>
+            </a:r>
+            <a:r>
+              <a:rPr lang="en-GB" dirty="0" err="1"/>
+              <a:t>all.CSvP</a:t>
+            </a:r>
+            <a:r>
+              <a:rPr lang="en-GB" dirty="0"/>
+              <a:t>[</a:t>
+            </a:r>
+            <a:r>
+              <a:rPr lang="en-GB" dirty="0" err="1"/>
+              <a:t>all.CSvP$adj.P.Val</a:t>
+            </a:r>
+            <a:r>
+              <a:rPr lang="en-GB" dirty="0"/>
+              <a:t> &lt; 0.05 &amp; </a:t>
+            </a:r>
+            <a:r>
+              <a:rPr lang="en-GB" dirty="0" err="1"/>
+              <a:t>all.CSvP</a:t>
+            </a:r>
+            <a:r>
+              <a:rPr lang="en-GB" dirty="0"/>
+              <a:t> &gt; 0.58 &amp; </a:t>
+            </a:r>
+            <a:r>
+              <a:rPr lang="en-GB" dirty="0" err="1"/>
+              <a:t>all.CS_PvCSxP$adj.P.Val</a:t>
+            </a:r>
+            <a:r>
+              <a:rPr lang="en-GB" dirty="0"/>
+              <a:t> &lt; 0.05 &amp; </a:t>
+            </a:r>
+            <a:r>
+              <a:rPr lang="en-GB" dirty="0" err="1"/>
+              <a:t>all.CS_PvCSxP$logFC</a:t>
+            </a:r>
+            <a:r>
+              <a:rPr lang="en-GB" dirty="0"/>
+              <a:t> &gt; 0.58,])</a:t>
+            </a:r>
+          </a:p>
+          <a:p>
+            <a:pPr marL="0" marR="0" lvl="0" indent="0" algn="l" defTabSz="914400" rtl="0" eaLnBrk="1" fontAlgn="auto" latinLnBrk="0" hangingPunct="1">
+              <a:lnSpc>
+                <a:spcPct val="100000"/>
+              </a:lnSpc>
+              <a:spcBef>
+                <a:spcPts val="0"/>
+              </a:spcBef>
+              <a:spcAft>
+                <a:spcPts val="0"/>
+              </a:spcAft>
+              <a:buClrTx/>
+              <a:buSzTx/>
+              <a:buFontTx/>
+              <a:buNone/>
+              <a:tabLst/>
+              <a:defRPr/>
+            </a:pPr>
+            <a:r>
+              <a:rPr lang="en-GB" dirty="0"/>
+              <a:t>[1] 3030</a:t>
+            </a:r>
+          </a:p>
+          <a:p>
+            <a:pPr marL="0" marR="0" lvl="0" indent="0" algn="l" defTabSz="914400" rtl="0" eaLnBrk="1" fontAlgn="auto" latinLnBrk="0" hangingPunct="1">
+              <a:lnSpc>
+                <a:spcPct val="100000"/>
+              </a:lnSpc>
+              <a:spcBef>
+                <a:spcPts val="0"/>
+              </a:spcBef>
+              <a:spcAft>
+                <a:spcPts val="0"/>
+              </a:spcAft>
+              <a:buClrTx/>
+              <a:buSzTx/>
+              <a:buFontTx/>
+              <a:buNone/>
+              <a:tabLst/>
+              <a:defRPr/>
+            </a:pPr>
+            <a:r>
+              <a:rPr lang="en-GB" dirty="0"/>
+              <a:t>&gt; </a:t>
+            </a:r>
+            <a:r>
+              <a:rPr lang="en-GB" dirty="0" err="1"/>
+              <a:t>nrow</a:t>
+            </a:r>
+            <a:r>
+              <a:rPr lang="en-GB" dirty="0"/>
+              <a:t>(</a:t>
+            </a:r>
+            <a:r>
+              <a:rPr lang="en-GB" dirty="0" err="1"/>
+              <a:t>all.CSvP</a:t>
+            </a:r>
+            <a:r>
+              <a:rPr lang="en-GB" dirty="0"/>
+              <a:t>[</a:t>
+            </a:r>
+            <a:r>
+              <a:rPr lang="en-GB" dirty="0" err="1"/>
+              <a:t>all.CSvP$adj.P.Val</a:t>
+            </a:r>
+            <a:r>
+              <a:rPr lang="en-GB" dirty="0"/>
+              <a:t> &lt; 0.05 &amp; </a:t>
+            </a:r>
+            <a:r>
+              <a:rPr lang="en-GB" dirty="0" err="1"/>
+              <a:t>all.CSvP</a:t>
+            </a:r>
+            <a:r>
+              <a:rPr lang="en-GB" dirty="0"/>
+              <a:t> &lt; -0.58 &amp; </a:t>
+            </a:r>
+            <a:r>
+              <a:rPr lang="en-GB" dirty="0" err="1"/>
+              <a:t>all.CS_PvCSxP$adj.P.Val</a:t>
+            </a:r>
+            <a:r>
+              <a:rPr lang="en-GB" dirty="0"/>
+              <a:t> &lt; 0.05 &amp; </a:t>
+            </a:r>
+            <a:r>
+              <a:rPr lang="en-GB" dirty="0" err="1"/>
+              <a:t>all.CS_PvCSxP$logFC</a:t>
+            </a:r>
+            <a:r>
+              <a:rPr lang="en-GB" dirty="0"/>
+              <a:t> &lt; -0.58,])</a:t>
+            </a:r>
+          </a:p>
+          <a:p>
+            <a:pPr marL="0" marR="0" lvl="0" indent="0" algn="l" defTabSz="914400" rtl="0" eaLnBrk="1" fontAlgn="auto" latinLnBrk="0" hangingPunct="1">
+              <a:lnSpc>
+                <a:spcPct val="100000"/>
+              </a:lnSpc>
+              <a:spcBef>
+                <a:spcPts val="0"/>
+              </a:spcBef>
+              <a:spcAft>
+                <a:spcPts val="0"/>
+              </a:spcAft>
+              <a:buClrTx/>
+              <a:buSzTx/>
+              <a:buFontTx/>
+              <a:buNone/>
+              <a:tabLst/>
+              <a:defRPr/>
+            </a:pPr>
+            <a:r>
+              <a:rPr lang="en-GB" dirty="0"/>
+              <a:t>[1] 630</a:t>
+            </a:r>
+          </a:p>
+          <a:p>
+            <a:pPr marL="0" marR="0" lvl="0" indent="0" algn="l" defTabSz="914400" rtl="0" eaLnBrk="1" fontAlgn="auto" latinLnBrk="0" hangingPunct="1">
+              <a:lnSpc>
+                <a:spcPct val="100000"/>
+              </a:lnSpc>
+              <a:spcBef>
+                <a:spcPts val="0"/>
+              </a:spcBef>
+              <a:spcAft>
+                <a:spcPts val="0"/>
+              </a:spcAft>
+              <a:buClrTx/>
+              <a:buSzTx/>
+              <a:buFontTx/>
+              <a:buNone/>
+              <a:tabLst/>
+              <a:defRPr/>
+            </a:pPr>
+            <a:r>
+              <a:rPr lang="en-GB" dirty="0"/>
+              <a:t>&gt; </a:t>
+            </a:r>
+            <a:r>
+              <a:rPr lang="en-GB" dirty="0" err="1"/>
+              <a:t>nrow</a:t>
+            </a:r>
+            <a:r>
+              <a:rPr lang="en-GB" dirty="0"/>
+              <a:t>(</a:t>
+            </a:r>
+            <a:r>
+              <a:rPr lang="en-GB" dirty="0" err="1"/>
+              <a:t>all.CSvP</a:t>
+            </a:r>
+            <a:r>
+              <a:rPr lang="en-GB" dirty="0"/>
+              <a:t>[</a:t>
+            </a:r>
+            <a:r>
+              <a:rPr lang="en-GB" dirty="0" err="1"/>
+              <a:t>all.CSvP$adj.P.Val</a:t>
+            </a:r>
+            <a:r>
+              <a:rPr lang="en-GB" dirty="0"/>
+              <a:t> &lt; 0.05 &amp; </a:t>
+            </a:r>
+            <a:r>
+              <a:rPr lang="en-GB" dirty="0" err="1"/>
+              <a:t>all.CSvP</a:t>
+            </a:r>
+            <a:r>
+              <a:rPr lang="en-GB" dirty="0"/>
+              <a:t> &gt; 0.58,])</a:t>
+            </a:r>
+          </a:p>
+          <a:p>
+            <a:pPr marL="0" marR="0" lvl="0" indent="0" algn="l" defTabSz="914400" rtl="0" eaLnBrk="1" fontAlgn="auto" latinLnBrk="0" hangingPunct="1">
+              <a:lnSpc>
+                <a:spcPct val="100000"/>
+              </a:lnSpc>
+              <a:spcBef>
+                <a:spcPts val="0"/>
+              </a:spcBef>
+              <a:spcAft>
+                <a:spcPts val="0"/>
+              </a:spcAft>
+              <a:buClrTx/>
+              <a:buSzTx/>
+              <a:buFontTx/>
+              <a:buNone/>
+              <a:tabLst/>
+              <a:defRPr/>
+            </a:pPr>
+            <a:r>
+              <a:rPr lang="en-GB" dirty="0"/>
+              <a:t>[1] 7579</a:t>
+            </a:r>
+          </a:p>
+          <a:p>
+            <a:pPr marL="0" marR="0" lvl="0" indent="0" algn="l" defTabSz="914400" rtl="0" eaLnBrk="1" fontAlgn="auto" latinLnBrk="0" hangingPunct="1">
+              <a:lnSpc>
+                <a:spcPct val="100000"/>
+              </a:lnSpc>
+              <a:spcBef>
+                <a:spcPts val="0"/>
+              </a:spcBef>
+              <a:spcAft>
+                <a:spcPts val="0"/>
+              </a:spcAft>
+              <a:buClrTx/>
+              <a:buSzTx/>
+              <a:buFontTx/>
+              <a:buNone/>
+              <a:tabLst/>
+              <a:defRPr/>
+            </a:pPr>
+            <a:r>
+              <a:rPr lang="en-GB" dirty="0"/>
+              <a:t>&gt; </a:t>
+            </a:r>
+            <a:r>
+              <a:rPr lang="en-GB" dirty="0" err="1"/>
+              <a:t>nrow</a:t>
+            </a:r>
+            <a:r>
+              <a:rPr lang="en-GB" dirty="0"/>
+              <a:t>(</a:t>
+            </a:r>
+            <a:r>
+              <a:rPr lang="en-GB" dirty="0" err="1"/>
+              <a:t>all.CSvP</a:t>
+            </a:r>
+            <a:r>
+              <a:rPr lang="en-GB" dirty="0"/>
+              <a:t>[</a:t>
+            </a:r>
+            <a:r>
+              <a:rPr lang="en-GB" dirty="0" err="1"/>
+              <a:t>all.CSvP$adj.P.Val</a:t>
+            </a:r>
+            <a:r>
+              <a:rPr lang="en-GB" dirty="0"/>
+              <a:t> &lt; 0.05 &amp; </a:t>
+            </a:r>
+            <a:r>
+              <a:rPr lang="en-GB" dirty="0" err="1"/>
+              <a:t>all.CSvP</a:t>
+            </a:r>
+            <a:r>
+              <a:rPr lang="en-GB" dirty="0"/>
+              <a:t> &lt; -0.58,])</a:t>
+            </a:r>
+          </a:p>
+          <a:p>
+            <a:pPr marL="0" marR="0" lvl="0" indent="0" algn="l" defTabSz="914400" rtl="0" eaLnBrk="1" fontAlgn="auto" latinLnBrk="0" hangingPunct="1">
+              <a:lnSpc>
+                <a:spcPct val="100000"/>
+              </a:lnSpc>
+              <a:spcBef>
+                <a:spcPts val="0"/>
+              </a:spcBef>
+              <a:spcAft>
+                <a:spcPts val="0"/>
+              </a:spcAft>
+              <a:buClrTx/>
+              <a:buSzTx/>
+              <a:buFontTx/>
+              <a:buNone/>
+              <a:tabLst/>
+              <a:defRPr/>
+            </a:pPr>
+            <a:r>
+              <a:rPr lang="en-GB" dirty="0"/>
+              <a:t>[1] 3027</a:t>
+            </a:r>
+          </a:p>
+          <a:p>
+            <a:pPr marL="0" marR="0" lvl="0" indent="0" algn="l" defTabSz="914400" rtl="0" eaLnBrk="1" fontAlgn="auto" latinLnBrk="0" hangingPunct="1">
+              <a:lnSpc>
+                <a:spcPct val="100000"/>
+              </a:lnSpc>
+              <a:spcBef>
+                <a:spcPts val="0"/>
+              </a:spcBef>
+              <a:spcAft>
+                <a:spcPts val="0"/>
+              </a:spcAft>
+              <a:buClrTx/>
+              <a:buSzTx/>
+              <a:buFontTx/>
+              <a:buNone/>
+              <a:tabLst/>
+              <a:defRPr/>
+            </a:pPr>
+            <a:r>
+              <a:rPr lang="en-GB" dirty="0"/>
+              <a:t>&gt; </a:t>
+            </a:r>
+            <a:r>
+              <a:rPr lang="en-GB" dirty="0" err="1"/>
+              <a:t>nrow</a:t>
+            </a:r>
+            <a:r>
+              <a:rPr lang="en-GB" dirty="0"/>
+              <a:t>(</a:t>
+            </a:r>
+            <a:r>
+              <a:rPr lang="en-GB" dirty="0" err="1"/>
+              <a:t>all.CS_PvCSxP</a:t>
+            </a:r>
+            <a:r>
+              <a:rPr lang="en-GB" dirty="0"/>
+              <a:t>[</a:t>
+            </a:r>
+            <a:r>
+              <a:rPr lang="en-GB" dirty="0" err="1"/>
+              <a:t>all.CS_PvCSxP$adj.P.Val</a:t>
+            </a:r>
+            <a:r>
+              <a:rPr lang="en-GB" dirty="0"/>
+              <a:t> &lt; 0.05 &amp; </a:t>
+            </a:r>
+            <a:r>
+              <a:rPr lang="en-GB" dirty="0" err="1"/>
+              <a:t>all.CS_PvCSxP$logFC</a:t>
+            </a:r>
+            <a:r>
+              <a:rPr lang="en-GB" dirty="0"/>
+              <a:t> &gt; 0.58,])</a:t>
+            </a:r>
+          </a:p>
+          <a:p>
+            <a:pPr marL="0" marR="0" lvl="0" indent="0" algn="l" defTabSz="914400" rtl="0" eaLnBrk="1" fontAlgn="auto" latinLnBrk="0" hangingPunct="1">
+              <a:lnSpc>
+                <a:spcPct val="100000"/>
+              </a:lnSpc>
+              <a:spcBef>
+                <a:spcPts val="0"/>
+              </a:spcBef>
+              <a:spcAft>
+                <a:spcPts val="0"/>
+              </a:spcAft>
+              <a:buClrTx/>
+              <a:buSzTx/>
+              <a:buFontTx/>
+              <a:buNone/>
+              <a:tabLst/>
+              <a:defRPr/>
+            </a:pPr>
+            <a:r>
+              <a:rPr lang="en-GB" dirty="0"/>
+              <a:t>[1] 8045</a:t>
+            </a:r>
+          </a:p>
+          <a:p>
+            <a:pPr marL="0" marR="0" lvl="0" indent="0" algn="l" defTabSz="914400" rtl="0" eaLnBrk="1" fontAlgn="auto" latinLnBrk="0" hangingPunct="1">
+              <a:lnSpc>
+                <a:spcPct val="100000"/>
+              </a:lnSpc>
+              <a:spcBef>
+                <a:spcPts val="0"/>
+              </a:spcBef>
+              <a:spcAft>
+                <a:spcPts val="0"/>
+              </a:spcAft>
+              <a:buClrTx/>
+              <a:buSzTx/>
+              <a:buFontTx/>
+              <a:buNone/>
+              <a:tabLst/>
+              <a:defRPr/>
+            </a:pPr>
+            <a:r>
+              <a:rPr lang="en-GB" dirty="0"/>
+              <a:t>&gt; </a:t>
+            </a:r>
+            <a:r>
+              <a:rPr lang="en-GB" dirty="0" err="1"/>
+              <a:t>nrow</a:t>
+            </a:r>
+            <a:r>
+              <a:rPr lang="en-GB" dirty="0"/>
+              <a:t>(</a:t>
+            </a:r>
+            <a:r>
+              <a:rPr lang="en-GB" dirty="0" err="1"/>
+              <a:t>all.CS_PvCSxP</a:t>
+            </a:r>
+            <a:r>
+              <a:rPr lang="en-GB" dirty="0"/>
+              <a:t>[</a:t>
+            </a:r>
+            <a:r>
+              <a:rPr lang="en-GB" dirty="0" err="1"/>
+              <a:t>all.CS_PvCSxP$adj.P.Val</a:t>
+            </a:r>
+            <a:r>
+              <a:rPr lang="en-GB" dirty="0"/>
+              <a:t> &lt; 0.05 &amp; </a:t>
+            </a:r>
+            <a:r>
+              <a:rPr lang="en-GB" dirty="0" err="1"/>
+              <a:t>all.CS_PvCSxP$logFC</a:t>
+            </a:r>
+            <a:r>
+              <a:rPr lang="en-GB" dirty="0"/>
+              <a:t> &lt; -0.58,])</a:t>
+            </a:r>
+          </a:p>
+          <a:p>
+            <a:pPr marL="0" marR="0" lvl="0" indent="0" algn="l" defTabSz="914400" rtl="0" eaLnBrk="1" fontAlgn="auto" latinLnBrk="0" hangingPunct="1">
+              <a:lnSpc>
+                <a:spcPct val="100000"/>
+              </a:lnSpc>
+              <a:spcBef>
+                <a:spcPts val="0"/>
+              </a:spcBef>
+              <a:spcAft>
+                <a:spcPts val="0"/>
+              </a:spcAft>
+              <a:buClrTx/>
+              <a:buSzTx/>
+              <a:buFontTx/>
+              <a:buNone/>
+              <a:tabLst/>
+              <a:defRPr/>
+            </a:pPr>
+            <a:r>
+              <a:rPr lang="en-GB" dirty="0"/>
+              <a:t>[1] 6568</a:t>
+            </a:r>
+          </a:p>
+          <a:p>
+            <a:pPr marL="0" marR="0" lvl="0" indent="0" algn="l" defTabSz="914400" rtl="0" eaLnBrk="1" fontAlgn="auto" latinLnBrk="0" hangingPunct="1">
+              <a:lnSpc>
+                <a:spcPct val="100000"/>
+              </a:lnSpc>
+              <a:spcBef>
+                <a:spcPts val="0"/>
+              </a:spcBef>
+              <a:spcAft>
+                <a:spcPts val="0"/>
+              </a:spcAft>
+              <a:buClrTx/>
+              <a:buSzTx/>
+              <a:buFontTx/>
+              <a:buNone/>
+              <a:tabLst/>
+              <a:defRPr/>
+            </a:pPr>
+            <a:r>
+              <a:rPr lang="en-GB" dirty="0"/>
+              <a:t>&gt; </a:t>
+            </a:r>
+            <a:r>
+              <a:rPr lang="en-GB" dirty="0" err="1"/>
+              <a:t>nrow</a:t>
+            </a:r>
+            <a:r>
+              <a:rPr lang="en-GB" dirty="0"/>
+              <a:t>(</a:t>
+            </a:r>
+            <a:r>
+              <a:rPr lang="en-GB" dirty="0" err="1"/>
+              <a:t>all.CSvP</a:t>
+            </a:r>
+            <a:r>
+              <a:rPr lang="en-GB" dirty="0"/>
+              <a:t>)</a:t>
+            </a:r>
+          </a:p>
+          <a:p>
+            <a:pPr marL="0" marR="0" lvl="0" indent="0" algn="l" defTabSz="914400" rtl="0" eaLnBrk="1" fontAlgn="auto" latinLnBrk="0" hangingPunct="1">
+              <a:lnSpc>
+                <a:spcPct val="100000"/>
+              </a:lnSpc>
+              <a:spcBef>
+                <a:spcPts val="0"/>
+              </a:spcBef>
+              <a:spcAft>
+                <a:spcPts val="0"/>
+              </a:spcAft>
+              <a:buClrTx/>
+              <a:buSzTx/>
+              <a:buFontTx/>
+              <a:buNone/>
+              <a:tabLst/>
+              <a:defRPr/>
+            </a:pPr>
+            <a:r>
+              <a:rPr lang="en-GB" dirty="0"/>
+              <a:t>[1] 35464</a:t>
+            </a:r>
+          </a:p>
+          <a:p>
+            <a:pPr marL="0" marR="0" lvl="0" indent="0" algn="l" defTabSz="914400" rtl="0" eaLnBrk="1" fontAlgn="auto" latinLnBrk="0" hangingPunct="1">
+              <a:lnSpc>
+                <a:spcPct val="100000"/>
+              </a:lnSpc>
+              <a:spcBef>
+                <a:spcPts val="0"/>
+              </a:spcBef>
+              <a:spcAft>
+                <a:spcPts val="0"/>
+              </a:spcAft>
+              <a:buClrTx/>
+              <a:buSzTx/>
+              <a:buFontTx/>
+              <a:buNone/>
+              <a:tabLst/>
+              <a:defRPr/>
+            </a:pPr>
+            <a:endParaRPr lang="en-DE" dirty="0"/>
+          </a:p>
+          <a:p>
+            <a:endParaRPr lang="en-DE" dirty="0"/>
+          </a:p>
+        </p:txBody>
+      </p:sp>
+      <p:sp>
+        <p:nvSpPr>
+          <p:cNvPr id="4" name="Slide Number Placeholder 3"/>
+          <p:cNvSpPr>
+            <a:spLocks noGrp="1"/>
+          </p:cNvSpPr>
+          <p:nvPr>
+            <p:ph type="sldNum" sz="quarter" idx="5"/>
+          </p:nvPr>
+        </p:nvSpPr>
+        <p:spPr/>
+        <p:txBody>
+          <a:bodyPr/>
+          <a:lstStyle/>
+          <a:p>
+            <a:fld id="{BA48473D-6385-394A-B5E2-7D1906D53F94}" type="slidenum">
+              <a:rPr lang="en-DE" smtClean="0"/>
+              <a:t>1</a:t>
+            </a:fld>
+            <a:endParaRPr lang="en-DE"/>
+          </a:p>
+        </p:txBody>
+      </p:sp>
+    </p:spTree>
+    <p:extLst>
+      <p:ext uri="{BB962C8B-B14F-4D97-AF65-F5344CB8AC3E}">
+        <p14:creationId xmlns:p14="http://schemas.microsoft.com/office/powerpoint/2010/main" val="2671893520"/>
+      </p:ext>
+    </p:extLst>
+  </p:cSld>
+  <p:clrMapOvr>
+    <a:masterClrMapping/>
+  </p:clrMapOvr>
+</p:notes>
 </file>
 
 <file path=ppt/slideLayouts/slideLayout1.xml><?xml version="1.0" encoding="utf-8"?>
@@ -494,15 +1317,15 @@
         </p:nvSpPr>
         <p:spPr>
           <a:xfrm>
-            <a:off x="97155" y="149648"/>
-            <a:ext cx="1101090" cy="318347"/>
+            <a:off x="166092" y="237463"/>
+            <a:ext cx="1882379" cy="505154"/>
           </a:xfrm>
         </p:spPr>
         <p:txBody>
           <a:bodyPr anchor="b"/>
           <a:lstStyle>
             <a:lvl1pPr algn="ctr">
-              <a:defRPr sz="800"/>
+              <a:defRPr sz="1270"/>
             </a:lvl1pPr>
           </a:lstStyle>
           <a:p>
@@ -526,8 +1349,8 @@
         </p:nvSpPr>
         <p:spPr>
           <a:xfrm>
-            <a:off x="161925" y="480272"/>
-            <a:ext cx="971550" cy="220768"/>
+            <a:off x="276821" y="762098"/>
+            <a:ext cx="1660922" cy="350316"/>
           </a:xfrm>
         </p:spPr>
         <p:txBody>
@@ -535,39 +1358,39 @@
           <a:lstStyle>
             <a:lvl1pPr marL="0" indent="0" algn="ctr">
               <a:buNone/>
-              <a:defRPr sz="320"/>
+              <a:defRPr sz="508"/>
             </a:lvl1pPr>
-            <a:lvl2pPr marL="60945" indent="0" algn="ctr">
-              <a:buNone/>
-              <a:defRPr sz="267"/>
+            <a:lvl2pPr marL="96744" indent="0" algn="ctr">
+              <a:buNone/>
+              <a:defRPr sz="423"/>
             </a:lvl2pPr>
-            <a:lvl3pPr marL="121890" indent="0" algn="ctr">
-              <a:buNone/>
-              <a:defRPr sz="240"/>
+            <a:lvl3pPr marL="193487" indent="0" algn="ctr">
+              <a:buNone/>
+              <a:defRPr sz="381"/>
             </a:lvl3pPr>
-            <a:lvl4pPr marL="182834" indent="0" algn="ctr">
-              <a:buNone/>
-              <a:defRPr sz="213"/>
+            <a:lvl4pPr marL="290231" indent="0" algn="ctr">
+              <a:buNone/>
+              <a:defRPr sz="339"/>
             </a:lvl4pPr>
-            <a:lvl5pPr marL="243779" indent="0" algn="ctr">
-              <a:buNone/>
-              <a:defRPr sz="213"/>
+            <a:lvl5pPr marL="386974" indent="0" algn="ctr">
+              <a:buNone/>
+              <a:defRPr sz="339"/>
             </a:lvl5pPr>
-            <a:lvl6pPr marL="304724" indent="0" algn="ctr">
-              <a:buNone/>
-              <a:defRPr sz="213"/>
+            <a:lvl6pPr marL="483718" indent="0" algn="ctr">
+              <a:buNone/>
+              <a:defRPr sz="339"/>
             </a:lvl6pPr>
-            <a:lvl7pPr marL="365669" indent="0" algn="ctr">
-              <a:buNone/>
-              <a:defRPr sz="213"/>
+            <a:lvl7pPr marL="580461" indent="0" algn="ctr">
+              <a:buNone/>
+              <a:defRPr sz="339"/>
             </a:lvl7pPr>
-            <a:lvl8pPr marL="426613" indent="0" algn="ctr">
-              <a:buNone/>
-              <a:defRPr sz="213"/>
+            <a:lvl8pPr marL="677205" indent="0" algn="ctr">
+              <a:buNone/>
+              <a:defRPr sz="339"/>
             </a:lvl8pPr>
-            <a:lvl9pPr marL="487558" indent="0" algn="ctr">
-              <a:buNone/>
-              <a:defRPr sz="213"/>
+            <a:lvl9pPr marL="773948" indent="0" algn="ctr">
+              <a:buNone/>
+              <a:defRPr sz="339"/>
             </a:lvl9pPr>
           </a:lstStyle>
           <a:p>
@@ -596,7 +1419,7 @@
           <a:p>
             <a:fld id="{CF9FBDB8-36C6-4744-999D-C99C2C96D370}" type="datetimeFigureOut">
               <a:rPr lang="en-DE" smtClean="0"/>
-              <a:t>13.05.26</a:t>
+              <a:t>20.05.26</a:t>
             </a:fld>
             <a:endParaRPr lang="en-DE"/>
           </a:p>
@@ -647,7 +1470,7 @@
     </p:spTree>
     <p:extLst>
       <p:ext uri="{BB962C8B-B14F-4D97-AF65-F5344CB8AC3E}">
-        <p14:creationId xmlns:p14="http://schemas.microsoft.com/office/powerpoint/2010/main" val="3025560068"/>
+        <p14:creationId xmlns:p14="http://schemas.microsoft.com/office/powerpoint/2010/main" val="535947767"/>
       </p:ext>
     </p:extLst>
   </p:cSld>
@@ -766,7 +1589,7 @@
           <a:p>
             <a:fld id="{CF9FBDB8-36C6-4744-999D-C99C2C96D370}" type="datetimeFigureOut">
               <a:rPr lang="en-DE" smtClean="0"/>
-              <a:t>13.05.26</a:t>
+              <a:t>20.05.26</a:t>
             </a:fld>
             <a:endParaRPr lang="en-DE"/>
           </a:p>
@@ -817,7 +1640,7 @@
     </p:spTree>
     <p:extLst>
       <p:ext uri="{BB962C8B-B14F-4D97-AF65-F5344CB8AC3E}">
-        <p14:creationId xmlns:p14="http://schemas.microsoft.com/office/powerpoint/2010/main" val="1868659516"/>
+        <p14:creationId xmlns:p14="http://schemas.microsoft.com/office/powerpoint/2010/main" val="777625788"/>
       </p:ext>
     </p:extLst>
   </p:cSld>
@@ -856,8 +1679,8 @@
         </p:nvSpPr>
         <p:spPr>
           <a:xfrm>
-            <a:off x="927021" y="48683"/>
-            <a:ext cx="279321" cy="774912"/>
+            <a:off x="1584797" y="77251"/>
+            <a:ext cx="477515" cy="1229634"/>
           </a:xfrm>
         </p:spPr>
         <p:txBody>
@@ -884,8 +1707,8 @@
         </p:nvSpPr>
         <p:spPr>
           <a:xfrm>
-            <a:off x="89059" y="48683"/>
-            <a:ext cx="821769" cy="774912"/>
+            <a:off x="152252" y="77251"/>
+            <a:ext cx="1404863" cy="1229634"/>
           </a:xfrm>
         </p:spPr>
         <p:txBody>
@@ -946,7 +1769,7 @@
           <a:p>
             <a:fld id="{CF9FBDB8-36C6-4744-999D-C99C2C96D370}" type="datetimeFigureOut">
               <a:rPr lang="en-DE" smtClean="0"/>
-              <a:t>13.05.26</a:t>
+              <a:t>20.05.26</a:t>
             </a:fld>
             <a:endParaRPr lang="en-DE"/>
           </a:p>
@@ -997,7 +1820,7 @@
     </p:spTree>
     <p:extLst>
       <p:ext uri="{BB962C8B-B14F-4D97-AF65-F5344CB8AC3E}">
-        <p14:creationId xmlns:p14="http://schemas.microsoft.com/office/powerpoint/2010/main" val="2823842138"/>
+        <p14:creationId xmlns:p14="http://schemas.microsoft.com/office/powerpoint/2010/main" val="2386571847"/>
       </p:ext>
     </p:extLst>
   </p:cSld>
@@ -1116,7 +1939,7 @@
           <a:p>
             <a:fld id="{CF9FBDB8-36C6-4744-999D-C99C2C96D370}" type="datetimeFigureOut">
               <a:rPr lang="en-DE" smtClean="0"/>
-              <a:t>13.05.26</a:t>
+              <a:t>20.05.26</a:t>
             </a:fld>
             <a:endParaRPr lang="en-DE"/>
           </a:p>
@@ -1167,7 +1990,7 @@
     </p:spTree>
     <p:extLst>
       <p:ext uri="{BB962C8B-B14F-4D97-AF65-F5344CB8AC3E}">
-        <p14:creationId xmlns:p14="http://schemas.microsoft.com/office/powerpoint/2010/main" val="1146369774"/>
+        <p14:creationId xmlns:p14="http://schemas.microsoft.com/office/powerpoint/2010/main" val="3920483920"/>
       </p:ext>
     </p:extLst>
   </p:cSld>
@@ -1206,15 +2029,15 @@
         </p:nvSpPr>
         <p:spPr>
           <a:xfrm>
-            <a:off x="88384" y="227965"/>
-            <a:ext cx="1117283" cy="380365"/>
+            <a:off x="151098" y="361737"/>
+            <a:ext cx="1910061" cy="603565"/>
           </a:xfrm>
         </p:spPr>
         <p:txBody>
           <a:bodyPr anchor="b"/>
           <a:lstStyle>
             <a:lvl1pPr>
-              <a:defRPr sz="800"/>
+              <a:defRPr sz="1270"/>
             </a:lvl1pPr>
           </a:lstStyle>
           <a:p>
@@ -1238,8 +2061,8 @@
         </p:nvSpPr>
         <p:spPr>
           <a:xfrm>
-            <a:off x="88384" y="611929"/>
-            <a:ext cx="1117283" cy="200025"/>
+            <a:off x="151098" y="971012"/>
+            <a:ext cx="1910061" cy="317401"/>
           </a:xfrm>
         </p:spPr>
         <p:txBody>
@@ -1247,7 +2070,7 @@
           <a:lstStyle>
             <a:lvl1pPr marL="0" indent="0">
               <a:buNone/>
-              <a:defRPr sz="320">
+              <a:defRPr sz="508">
                 <a:solidFill>
                   <a:schemeClr val="tx1">
                     <a:tint val="82000"/>
@@ -1255,9 +2078,9 @@
                 </a:solidFill>
               </a:defRPr>
             </a:lvl1pPr>
-            <a:lvl2pPr marL="60945" indent="0">
-              <a:buNone/>
-              <a:defRPr sz="267">
+            <a:lvl2pPr marL="96744" indent="0">
+              <a:buNone/>
+              <a:defRPr sz="423">
                 <a:solidFill>
                   <a:schemeClr val="tx1">
                     <a:tint val="82000"/>
@@ -1265,9 +2088,9 @@
                 </a:solidFill>
               </a:defRPr>
             </a:lvl2pPr>
-            <a:lvl3pPr marL="121890" indent="0">
-              <a:buNone/>
-              <a:defRPr sz="240">
+            <a:lvl3pPr marL="193487" indent="0">
+              <a:buNone/>
+              <a:defRPr sz="381">
                 <a:solidFill>
                   <a:schemeClr val="tx1">
                     <a:tint val="82000"/>
@@ -1275,9 +2098,9 @@
                 </a:solidFill>
               </a:defRPr>
             </a:lvl3pPr>
-            <a:lvl4pPr marL="182834" indent="0">
-              <a:buNone/>
-              <a:defRPr sz="213">
+            <a:lvl4pPr marL="290231" indent="0">
+              <a:buNone/>
+              <a:defRPr sz="339">
                 <a:solidFill>
                   <a:schemeClr val="tx1">
                     <a:tint val="82000"/>
@@ -1285,9 +2108,9 @@
                 </a:solidFill>
               </a:defRPr>
             </a:lvl4pPr>
-            <a:lvl5pPr marL="243779" indent="0">
-              <a:buNone/>
-              <a:defRPr sz="213">
+            <a:lvl5pPr marL="386974" indent="0">
+              <a:buNone/>
+              <a:defRPr sz="339">
                 <a:solidFill>
                   <a:schemeClr val="tx1">
                     <a:tint val="82000"/>
@@ -1295,9 +2118,9 @@
                 </a:solidFill>
               </a:defRPr>
             </a:lvl5pPr>
-            <a:lvl6pPr marL="304724" indent="0">
-              <a:buNone/>
-              <a:defRPr sz="213">
+            <a:lvl6pPr marL="483718" indent="0">
+              <a:buNone/>
+              <a:defRPr sz="339">
                 <a:solidFill>
                   <a:schemeClr val="tx1">
                     <a:tint val="82000"/>
@@ -1305,9 +2128,9 @@
                 </a:solidFill>
               </a:defRPr>
             </a:lvl6pPr>
-            <a:lvl7pPr marL="365669" indent="0">
-              <a:buNone/>
-              <a:defRPr sz="213">
+            <a:lvl7pPr marL="580461" indent="0">
+              <a:buNone/>
+              <a:defRPr sz="339">
                 <a:solidFill>
                   <a:schemeClr val="tx1">
                     <a:tint val="82000"/>
@@ -1315,9 +2138,9 @@
                 </a:solidFill>
               </a:defRPr>
             </a:lvl7pPr>
-            <a:lvl8pPr marL="426613" indent="0">
-              <a:buNone/>
-              <a:defRPr sz="213">
+            <a:lvl8pPr marL="677205" indent="0">
+              <a:buNone/>
+              <a:defRPr sz="339">
                 <a:solidFill>
                   <a:schemeClr val="tx1">
                     <a:tint val="82000"/>
@@ -1325,9 +2148,9 @@
                 </a:solidFill>
               </a:defRPr>
             </a:lvl8pPr>
-            <a:lvl9pPr marL="487558" indent="0">
-              <a:buNone/>
-              <a:defRPr sz="213">
+            <a:lvl9pPr marL="773948" indent="0">
+              <a:buNone/>
+              <a:defRPr sz="339">
                 <a:solidFill>
                   <a:schemeClr val="tx1">
                     <a:tint val="82000"/>
@@ -1362,7 +2185,7 @@
           <a:p>
             <a:fld id="{CF9FBDB8-36C6-4744-999D-C99C2C96D370}" type="datetimeFigureOut">
               <a:rPr lang="en-DE" smtClean="0"/>
-              <a:t>13.05.26</a:t>
+              <a:t>20.05.26</a:t>
             </a:fld>
             <a:endParaRPr lang="en-DE"/>
           </a:p>
@@ -1413,7 +2236,7 @@
     </p:spTree>
     <p:extLst>
       <p:ext uri="{BB962C8B-B14F-4D97-AF65-F5344CB8AC3E}">
-        <p14:creationId xmlns:p14="http://schemas.microsoft.com/office/powerpoint/2010/main" val="1058612403"/>
+        <p14:creationId xmlns:p14="http://schemas.microsoft.com/office/powerpoint/2010/main" val="3867389370"/>
       </p:ext>
     </p:extLst>
   </p:cSld>
@@ -1475,8 +2298,8 @@
         </p:nvSpPr>
         <p:spPr>
           <a:xfrm>
-            <a:off x="89059" y="243417"/>
-            <a:ext cx="550545" cy="580178"/>
+            <a:off x="152251" y="386255"/>
+            <a:ext cx="941189" cy="920630"/>
           </a:xfrm>
         </p:spPr>
         <p:txBody>
@@ -1532,8 +2355,8 @@
         </p:nvSpPr>
         <p:spPr>
           <a:xfrm>
-            <a:off x="655796" y="243417"/>
-            <a:ext cx="550545" cy="580178"/>
+            <a:off x="1121123" y="386255"/>
+            <a:ext cx="941189" cy="920630"/>
           </a:xfrm>
         </p:spPr>
         <p:txBody>
@@ -1594,7 +2417,7 @@
           <a:p>
             <a:fld id="{CF9FBDB8-36C6-4744-999D-C99C2C96D370}" type="datetimeFigureOut">
               <a:rPr lang="en-DE" smtClean="0"/>
-              <a:t>13.05.26</a:t>
+              <a:t>20.05.26</a:t>
             </a:fld>
             <a:endParaRPr lang="en-DE"/>
           </a:p>
@@ -1645,7 +2468,7 @@
     </p:spTree>
     <p:extLst>
       <p:ext uri="{BB962C8B-B14F-4D97-AF65-F5344CB8AC3E}">
-        <p14:creationId xmlns:p14="http://schemas.microsoft.com/office/powerpoint/2010/main" val="3552603399"/>
+        <p14:creationId xmlns:p14="http://schemas.microsoft.com/office/powerpoint/2010/main" val="687728064"/>
       </p:ext>
     </p:extLst>
   </p:cSld>
@@ -1684,8 +2507,8 @@
         </p:nvSpPr>
         <p:spPr>
           <a:xfrm>
-            <a:off x="89227" y="48683"/>
-            <a:ext cx="1117283" cy="176742"/>
+            <a:off x="152539" y="77251"/>
+            <a:ext cx="1910061" cy="280455"/>
           </a:xfrm>
         </p:spPr>
         <p:txBody>
@@ -1712,8 +2535,8 @@
         </p:nvSpPr>
         <p:spPr>
           <a:xfrm>
-            <a:off x="89228" y="224155"/>
-            <a:ext cx="548015" cy="109855"/>
+            <a:off x="152540" y="355691"/>
+            <a:ext cx="936864" cy="174318"/>
           </a:xfrm>
         </p:spPr>
         <p:txBody>
@@ -1721,39 +2544,39 @@
           <a:lstStyle>
             <a:lvl1pPr marL="0" indent="0">
               <a:buNone/>
-              <a:defRPr sz="320" b="1"/>
+              <a:defRPr sz="508" b="1"/>
             </a:lvl1pPr>
-            <a:lvl2pPr marL="60945" indent="0">
-              <a:buNone/>
-              <a:defRPr sz="267" b="1"/>
+            <a:lvl2pPr marL="96744" indent="0">
+              <a:buNone/>
+              <a:defRPr sz="423" b="1"/>
             </a:lvl2pPr>
-            <a:lvl3pPr marL="121890" indent="0">
-              <a:buNone/>
-              <a:defRPr sz="240" b="1"/>
+            <a:lvl3pPr marL="193487" indent="0">
+              <a:buNone/>
+              <a:defRPr sz="381" b="1"/>
             </a:lvl3pPr>
-            <a:lvl4pPr marL="182834" indent="0">
-              <a:buNone/>
-              <a:defRPr sz="213" b="1"/>
+            <a:lvl4pPr marL="290231" indent="0">
+              <a:buNone/>
+              <a:defRPr sz="339" b="1"/>
             </a:lvl4pPr>
-            <a:lvl5pPr marL="243779" indent="0">
-              <a:buNone/>
-              <a:defRPr sz="213" b="1"/>
+            <a:lvl5pPr marL="386974" indent="0">
+              <a:buNone/>
+              <a:defRPr sz="339" b="1"/>
             </a:lvl5pPr>
-            <a:lvl6pPr marL="304724" indent="0">
-              <a:buNone/>
-              <a:defRPr sz="213" b="1"/>
+            <a:lvl6pPr marL="483718" indent="0">
+              <a:buNone/>
+              <a:defRPr sz="339" b="1"/>
             </a:lvl6pPr>
-            <a:lvl7pPr marL="365669" indent="0">
-              <a:buNone/>
-              <a:defRPr sz="213" b="1"/>
+            <a:lvl7pPr marL="580461" indent="0">
+              <a:buNone/>
+              <a:defRPr sz="339" b="1"/>
             </a:lvl7pPr>
-            <a:lvl8pPr marL="426613" indent="0">
-              <a:buNone/>
-              <a:defRPr sz="213" b="1"/>
+            <a:lvl8pPr marL="677205" indent="0">
+              <a:buNone/>
+              <a:defRPr sz="339" b="1"/>
             </a:lvl8pPr>
-            <a:lvl9pPr marL="487558" indent="0">
-              <a:buNone/>
-              <a:defRPr sz="213" b="1"/>
+            <a:lvl9pPr marL="773948" indent="0">
+              <a:buNone/>
+              <a:defRPr sz="339" b="1"/>
             </a:lvl9pPr>
           </a:lstStyle>
           <a:p>
@@ -1777,8 +2600,8 @@
         </p:nvSpPr>
         <p:spPr>
           <a:xfrm>
-            <a:off x="89228" y="334010"/>
-            <a:ext cx="548015" cy="491278"/>
+            <a:off x="152540" y="530009"/>
+            <a:ext cx="936864" cy="779563"/>
           </a:xfrm>
         </p:spPr>
         <p:txBody>
@@ -1834,8 +2657,8 @@
         </p:nvSpPr>
         <p:spPr>
           <a:xfrm>
-            <a:off x="655796" y="224155"/>
-            <a:ext cx="550714" cy="109855"/>
+            <a:off x="1121123" y="355691"/>
+            <a:ext cx="941478" cy="174318"/>
           </a:xfrm>
         </p:spPr>
         <p:txBody>
@@ -1843,39 +2666,39 @@
           <a:lstStyle>
             <a:lvl1pPr marL="0" indent="0">
               <a:buNone/>
-              <a:defRPr sz="320" b="1"/>
+              <a:defRPr sz="508" b="1"/>
             </a:lvl1pPr>
-            <a:lvl2pPr marL="60945" indent="0">
-              <a:buNone/>
-              <a:defRPr sz="267" b="1"/>
+            <a:lvl2pPr marL="96744" indent="0">
+              <a:buNone/>
+              <a:defRPr sz="423" b="1"/>
             </a:lvl2pPr>
-            <a:lvl3pPr marL="121890" indent="0">
-              <a:buNone/>
-              <a:defRPr sz="240" b="1"/>
+            <a:lvl3pPr marL="193487" indent="0">
+              <a:buNone/>
+              <a:defRPr sz="381" b="1"/>
             </a:lvl3pPr>
-            <a:lvl4pPr marL="182834" indent="0">
-              <a:buNone/>
-              <a:defRPr sz="213" b="1"/>
+            <a:lvl4pPr marL="290231" indent="0">
+              <a:buNone/>
+              <a:defRPr sz="339" b="1"/>
             </a:lvl4pPr>
-            <a:lvl5pPr marL="243779" indent="0">
-              <a:buNone/>
-              <a:defRPr sz="213" b="1"/>
+            <a:lvl5pPr marL="386974" indent="0">
+              <a:buNone/>
+              <a:defRPr sz="339" b="1"/>
             </a:lvl5pPr>
-            <a:lvl6pPr marL="304724" indent="0">
-              <a:buNone/>
-              <a:defRPr sz="213" b="1"/>
+            <a:lvl6pPr marL="483718" indent="0">
+              <a:buNone/>
+              <a:defRPr sz="339" b="1"/>
             </a:lvl6pPr>
-            <a:lvl7pPr marL="365669" indent="0">
-              <a:buNone/>
-              <a:defRPr sz="213" b="1"/>
+            <a:lvl7pPr marL="580461" indent="0">
+              <a:buNone/>
+              <a:defRPr sz="339" b="1"/>
             </a:lvl7pPr>
-            <a:lvl8pPr marL="426613" indent="0">
-              <a:buNone/>
-              <a:defRPr sz="213" b="1"/>
+            <a:lvl8pPr marL="677205" indent="0">
+              <a:buNone/>
+              <a:defRPr sz="339" b="1"/>
             </a:lvl8pPr>
-            <a:lvl9pPr marL="487558" indent="0">
-              <a:buNone/>
-              <a:defRPr sz="213" b="1"/>
+            <a:lvl9pPr marL="773948" indent="0">
+              <a:buNone/>
+              <a:defRPr sz="339" b="1"/>
             </a:lvl9pPr>
           </a:lstStyle>
           <a:p>
@@ -1899,8 +2722,8 @@
         </p:nvSpPr>
         <p:spPr>
           <a:xfrm>
-            <a:off x="655796" y="334010"/>
-            <a:ext cx="550714" cy="491278"/>
+            <a:off x="1121123" y="530009"/>
+            <a:ext cx="941478" cy="779563"/>
           </a:xfrm>
         </p:spPr>
         <p:txBody>
@@ -1961,7 +2784,7 @@
           <a:p>
             <a:fld id="{CF9FBDB8-36C6-4744-999D-C99C2C96D370}" type="datetimeFigureOut">
               <a:rPr lang="en-DE" smtClean="0"/>
-              <a:t>13.05.26</a:t>
+              <a:t>20.05.26</a:t>
             </a:fld>
             <a:endParaRPr lang="en-DE"/>
           </a:p>
@@ -2012,7 +2835,7 @@
     </p:spTree>
     <p:extLst>
       <p:ext uri="{BB962C8B-B14F-4D97-AF65-F5344CB8AC3E}">
-        <p14:creationId xmlns:p14="http://schemas.microsoft.com/office/powerpoint/2010/main" val="1317323940"/>
+        <p14:creationId xmlns:p14="http://schemas.microsoft.com/office/powerpoint/2010/main" val="2543761978"/>
       </p:ext>
     </p:extLst>
   </p:cSld>
@@ -2079,7 +2902,7 @@
           <a:p>
             <a:fld id="{CF9FBDB8-36C6-4744-999D-C99C2C96D370}" type="datetimeFigureOut">
               <a:rPr lang="en-DE" smtClean="0"/>
-              <a:t>13.05.26</a:t>
+              <a:t>20.05.26</a:t>
             </a:fld>
             <a:endParaRPr lang="en-DE"/>
           </a:p>
@@ -2130,7 +2953,7 @@
     </p:spTree>
     <p:extLst>
       <p:ext uri="{BB962C8B-B14F-4D97-AF65-F5344CB8AC3E}">
-        <p14:creationId xmlns:p14="http://schemas.microsoft.com/office/powerpoint/2010/main" val="3202932378"/>
+        <p14:creationId xmlns:p14="http://schemas.microsoft.com/office/powerpoint/2010/main" val="2958694888"/>
       </p:ext>
     </p:extLst>
   </p:cSld>
@@ -2174,7 +2997,7 @@
           <a:p>
             <a:fld id="{CF9FBDB8-36C6-4744-999D-C99C2C96D370}" type="datetimeFigureOut">
               <a:rPr lang="en-DE" smtClean="0"/>
-              <a:t>13.05.26</a:t>
+              <a:t>20.05.26</a:t>
             </a:fld>
             <a:endParaRPr lang="en-DE"/>
           </a:p>
@@ -2225,7 +3048,7 @@
     </p:spTree>
     <p:extLst>
       <p:ext uri="{BB962C8B-B14F-4D97-AF65-F5344CB8AC3E}">
-        <p14:creationId xmlns:p14="http://schemas.microsoft.com/office/powerpoint/2010/main" val="1678208491"/>
+        <p14:creationId xmlns:p14="http://schemas.microsoft.com/office/powerpoint/2010/main" val="1829921935"/>
       </p:ext>
     </p:extLst>
   </p:cSld>
@@ -2264,15 +3087,15 @@
         </p:nvSpPr>
         <p:spPr>
           <a:xfrm>
-            <a:off x="89228" y="60960"/>
-            <a:ext cx="417800" cy="213360"/>
+            <a:off x="152540" y="96732"/>
+            <a:ext cx="714254" cy="338561"/>
           </a:xfrm>
         </p:spPr>
         <p:txBody>
           <a:bodyPr anchor="b"/>
           <a:lstStyle>
             <a:lvl1pPr>
-              <a:defRPr sz="427"/>
+              <a:defRPr sz="677"/>
             </a:lvl1pPr>
           </a:lstStyle>
           <a:p>
@@ -2296,39 +3119,39 @@
         </p:nvSpPr>
         <p:spPr>
           <a:xfrm>
-            <a:off x="550714" y="131657"/>
-            <a:ext cx="655796" cy="649817"/>
+            <a:off x="941477" y="208914"/>
+            <a:ext cx="1121123" cy="1031133"/>
           </a:xfrm>
         </p:spPr>
         <p:txBody>
           <a:bodyPr/>
           <a:lstStyle>
             <a:lvl1pPr>
-              <a:defRPr sz="427"/>
+              <a:defRPr sz="677"/>
             </a:lvl1pPr>
             <a:lvl2pPr>
-              <a:defRPr sz="373"/>
+              <a:defRPr sz="592"/>
             </a:lvl2pPr>
             <a:lvl3pPr>
-              <a:defRPr sz="320"/>
+              <a:defRPr sz="508"/>
             </a:lvl3pPr>
             <a:lvl4pPr>
-              <a:defRPr sz="267"/>
+              <a:defRPr sz="423"/>
             </a:lvl4pPr>
             <a:lvl5pPr>
-              <a:defRPr sz="267"/>
+              <a:defRPr sz="423"/>
             </a:lvl5pPr>
             <a:lvl6pPr>
-              <a:defRPr sz="267"/>
+              <a:defRPr sz="423"/>
             </a:lvl6pPr>
             <a:lvl7pPr>
-              <a:defRPr sz="267"/>
+              <a:defRPr sz="423"/>
             </a:lvl7pPr>
             <a:lvl8pPr>
-              <a:defRPr sz="267"/>
+              <a:defRPr sz="423"/>
             </a:lvl8pPr>
             <a:lvl9pPr>
-              <a:defRPr sz="267"/>
+              <a:defRPr sz="423"/>
             </a:lvl9pPr>
           </a:lstStyle>
           <a:p>
@@ -2381,8 +3204,8 @@
         </p:nvSpPr>
         <p:spPr>
           <a:xfrm>
-            <a:off x="89228" y="274320"/>
-            <a:ext cx="417800" cy="508212"/>
+            <a:off x="152540" y="435293"/>
+            <a:ext cx="714254" cy="806433"/>
           </a:xfrm>
         </p:spPr>
         <p:txBody>
@@ -2390,39 +3213,39 @@
           <a:lstStyle>
             <a:lvl1pPr marL="0" indent="0">
               <a:buNone/>
-              <a:defRPr sz="213"/>
+              <a:defRPr sz="339"/>
             </a:lvl1pPr>
-            <a:lvl2pPr marL="60945" indent="0">
-              <a:buNone/>
-              <a:defRPr sz="187"/>
+            <a:lvl2pPr marL="96744" indent="0">
+              <a:buNone/>
+              <a:defRPr sz="296"/>
             </a:lvl2pPr>
-            <a:lvl3pPr marL="121890" indent="0">
-              <a:buNone/>
-              <a:defRPr sz="160"/>
+            <a:lvl3pPr marL="193487" indent="0">
+              <a:buNone/>
+              <a:defRPr sz="254"/>
             </a:lvl3pPr>
-            <a:lvl4pPr marL="182834" indent="0">
-              <a:buNone/>
-              <a:defRPr sz="133"/>
+            <a:lvl4pPr marL="290231" indent="0">
+              <a:buNone/>
+              <a:defRPr sz="212"/>
             </a:lvl4pPr>
-            <a:lvl5pPr marL="243779" indent="0">
-              <a:buNone/>
-              <a:defRPr sz="133"/>
+            <a:lvl5pPr marL="386974" indent="0">
+              <a:buNone/>
+              <a:defRPr sz="212"/>
             </a:lvl5pPr>
-            <a:lvl6pPr marL="304724" indent="0">
-              <a:buNone/>
-              <a:defRPr sz="133"/>
+            <a:lvl6pPr marL="483718" indent="0">
+              <a:buNone/>
+              <a:defRPr sz="212"/>
             </a:lvl6pPr>
-            <a:lvl7pPr marL="365669" indent="0">
-              <a:buNone/>
-              <a:defRPr sz="133"/>
+            <a:lvl7pPr marL="580461" indent="0">
+              <a:buNone/>
+              <a:defRPr sz="212"/>
             </a:lvl7pPr>
-            <a:lvl8pPr marL="426613" indent="0">
-              <a:buNone/>
-              <a:defRPr sz="133"/>
+            <a:lvl8pPr marL="677205" indent="0">
+              <a:buNone/>
+              <a:defRPr sz="212"/>
             </a:lvl8pPr>
-            <a:lvl9pPr marL="487558" indent="0">
-              <a:buNone/>
-              <a:defRPr sz="133"/>
+            <a:lvl9pPr marL="773948" indent="0">
+              <a:buNone/>
+              <a:defRPr sz="212"/>
             </a:lvl9pPr>
           </a:lstStyle>
           <a:p>
@@ -2451,7 +3274,7 @@
           <a:p>
             <a:fld id="{CF9FBDB8-36C6-4744-999D-C99C2C96D370}" type="datetimeFigureOut">
               <a:rPr lang="en-DE" smtClean="0"/>
-              <a:t>13.05.26</a:t>
+              <a:t>20.05.26</a:t>
             </a:fld>
             <a:endParaRPr lang="en-DE"/>
           </a:p>
@@ -2502,7 +3325,7 @@
     </p:spTree>
     <p:extLst>
       <p:ext uri="{BB962C8B-B14F-4D97-AF65-F5344CB8AC3E}">
-        <p14:creationId xmlns:p14="http://schemas.microsoft.com/office/powerpoint/2010/main" val="1660114380"/>
+        <p14:creationId xmlns:p14="http://schemas.microsoft.com/office/powerpoint/2010/main" val="1137721234"/>
       </p:ext>
     </p:extLst>
   </p:cSld>
@@ -2541,15 +3364,15 @@
         </p:nvSpPr>
         <p:spPr>
           <a:xfrm>
-            <a:off x="89228" y="60960"/>
-            <a:ext cx="417800" cy="213360"/>
+            <a:off x="152540" y="96732"/>
+            <a:ext cx="714254" cy="338561"/>
           </a:xfrm>
         </p:spPr>
         <p:txBody>
           <a:bodyPr anchor="b"/>
           <a:lstStyle>
             <a:lvl1pPr>
-              <a:defRPr sz="427"/>
+              <a:defRPr sz="677"/>
             </a:lvl1pPr>
           </a:lstStyle>
           <a:p>
@@ -2573,8 +3396,8 @@
         </p:nvSpPr>
         <p:spPr>
           <a:xfrm>
-            <a:off x="550714" y="131657"/>
-            <a:ext cx="655796" cy="649817"/>
+            <a:off x="941477" y="208914"/>
+            <a:ext cx="1121123" cy="1031133"/>
           </a:xfrm>
         </p:spPr>
         <p:txBody>
@@ -2582,39 +3405,39 @@
           <a:lstStyle>
             <a:lvl1pPr marL="0" indent="0">
               <a:buNone/>
-              <a:defRPr sz="427"/>
+              <a:defRPr sz="677"/>
             </a:lvl1pPr>
-            <a:lvl2pPr marL="60945" indent="0">
-              <a:buNone/>
-              <a:defRPr sz="373"/>
+            <a:lvl2pPr marL="96744" indent="0">
+              <a:buNone/>
+              <a:defRPr sz="592"/>
             </a:lvl2pPr>
-            <a:lvl3pPr marL="121890" indent="0">
-              <a:buNone/>
-              <a:defRPr sz="320"/>
+            <a:lvl3pPr marL="193487" indent="0">
+              <a:buNone/>
+              <a:defRPr sz="508"/>
             </a:lvl3pPr>
-            <a:lvl4pPr marL="182834" indent="0">
-              <a:buNone/>
-              <a:defRPr sz="267"/>
+            <a:lvl4pPr marL="290231" indent="0">
+              <a:buNone/>
+              <a:defRPr sz="423"/>
             </a:lvl4pPr>
-            <a:lvl5pPr marL="243779" indent="0">
-              <a:buNone/>
-              <a:defRPr sz="267"/>
+            <a:lvl5pPr marL="386974" indent="0">
+              <a:buNone/>
+              <a:defRPr sz="423"/>
             </a:lvl5pPr>
-            <a:lvl6pPr marL="304724" indent="0">
-              <a:buNone/>
-              <a:defRPr sz="267"/>
+            <a:lvl6pPr marL="483718" indent="0">
+              <a:buNone/>
+              <a:defRPr sz="423"/>
             </a:lvl6pPr>
-            <a:lvl7pPr marL="365669" indent="0">
-              <a:buNone/>
-              <a:defRPr sz="267"/>
+            <a:lvl7pPr marL="580461" indent="0">
+              <a:buNone/>
+              <a:defRPr sz="423"/>
             </a:lvl7pPr>
-            <a:lvl8pPr marL="426613" indent="0">
-              <a:buNone/>
-              <a:defRPr sz="267"/>
+            <a:lvl8pPr marL="677205" indent="0">
+              <a:buNone/>
+              <a:defRPr sz="423"/>
             </a:lvl8pPr>
-            <a:lvl9pPr marL="487558" indent="0">
-              <a:buNone/>
-              <a:defRPr sz="267"/>
+            <a:lvl9pPr marL="773948" indent="0">
+              <a:buNone/>
+              <a:defRPr sz="423"/>
             </a:lvl9pPr>
           </a:lstStyle>
           <a:p>
@@ -2638,8 +3461,8 @@
         </p:nvSpPr>
         <p:spPr>
           <a:xfrm>
-            <a:off x="89228" y="274320"/>
-            <a:ext cx="417800" cy="508212"/>
+            <a:off x="152540" y="435293"/>
+            <a:ext cx="714254" cy="806433"/>
           </a:xfrm>
         </p:spPr>
         <p:txBody>
@@ -2647,39 +3470,39 @@
           <a:lstStyle>
             <a:lvl1pPr marL="0" indent="0">
               <a:buNone/>
-              <a:defRPr sz="213"/>
+              <a:defRPr sz="339"/>
             </a:lvl1pPr>
-            <a:lvl2pPr marL="60945" indent="0">
-              <a:buNone/>
-              <a:defRPr sz="187"/>
+            <a:lvl2pPr marL="96744" indent="0">
+              <a:buNone/>
+              <a:defRPr sz="296"/>
             </a:lvl2pPr>
-            <a:lvl3pPr marL="121890" indent="0">
-              <a:buNone/>
-              <a:defRPr sz="160"/>
+            <a:lvl3pPr marL="193487" indent="0">
+              <a:buNone/>
+              <a:defRPr sz="254"/>
             </a:lvl3pPr>
-            <a:lvl4pPr marL="182834" indent="0">
-              <a:buNone/>
-              <a:defRPr sz="133"/>
+            <a:lvl4pPr marL="290231" indent="0">
+              <a:buNone/>
+              <a:defRPr sz="212"/>
             </a:lvl4pPr>
-            <a:lvl5pPr marL="243779" indent="0">
-              <a:buNone/>
-              <a:defRPr sz="133"/>
+            <a:lvl5pPr marL="386974" indent="0">
+              <a:buNone/>
+              <a:defRPr sz="212"/>
             </a:lvl5pPr>
-            <a:lvl6pPr marL="304724" indent="0">
-              <a:buNone/>
-              <a:defRPr sz="133"/>
+            <a:lvl6pPr marL="483718" indent="0">
+              <a:buNone/>
+              <a:defRPr sz="212"/>
             </a:lvl6pPr>
-            <a:lvl7pPr marL="365669" indent="0">
-              <a:buNone/>
-              <a:defRPr sz="133"/>
+            <a:lvl7pPr marL="580461" indent="0">
+              <a:buNone/>
+              <a:defRPr sz="212"/>
             </a:lvl7pPr>
-            <a:lvl8pPr marL="426613" indent="0">
-              <a:buNone/>
-              <a:defRPr sz="133"/>
+            <a:lvl8pPr marL="677205" indent="0">
+              <a:buNone/>
+              <a:defRPr sz="212"/>
             </a:lvl8pPr>
-            <a:lvl9pPr marL="487558" indent="0">
-              <a:buNone/>
-              <a:defRPr sz="133"/>
+            <a:lvl9pPr marL="773948" indent="0">
+              <a:buNone/>
+              <a:defRPr sz="212"/>
             </a:lvl9pPr>
           </a:lstStyle>
           <a:p>
@@ -2708,7 +3531,7 @@
           <a:p>
             <a:fld id="{CF9FBDB8-36C6-4744-999D-C99C2C96D370}" type="datetimeFigureOut">
               <a:rPr lang="en-DE" smtClean="0"/>
-              <a:t>13.05.26</a:t>
+              <a:t>20.05.26</a:t>
             </a:fld>
             <a:endParaRPr lang="en-DE"/>
           </a:p>
@@ -2759,7 +3582,7 @@
     </p:spTree>
     <p:extLst>
       <p:ext uri="{BB962C8B-B14F-4D97-AF65-F5344CB8AC3E}">
-        <p14:creationId xmlns:p14="http://schemas.microsoft.com/office/powerpoint/2010/main" val="2238535146"/>
+        <p14:creationId xmlns:p14="http://schemas.microsoft.com/office/powerpoint/2010/main" val="3732527587"/>
       </p:ext>
     </p:extLst>
   </p:cSld>
@@ -2803,8 +3626,8 @@
         </p:nvSpPr>
         <p:spPr>
           <a:xfrm>
-            <a:off x="89059" y="48683"/>
-            <a:ext cx="1117283" cy="176742"/>
+            <a:off x="152251" y="77251"/>
+            <a:ext cx="1910061" cy="280455"/>
           </a:xfrm>
           <a:prstGeom prst="rect">
             <a:avLst/>
@@ -2836,8 +3659,8 @@
         </p:nvSpPr>
         <p:spPr>
           <a:xfrm>
-            <a:off x="89059" y="243417"/>
-            <a:ext cx="1117283" cy="580178"/>
+            <a:off x="152251" y="386255"/>
+            <a:ext cx="1910061" cy="920630"/>
           </a:xfrm>
           <a:prstGeom prst="rect">
             <a:avLst/>
@@ -2898,8 +3721,8 @@
         </p:nvSpPr>
         <p:spPr>
           <a:xfrm>
-            <a:off x="89059" y="847514"/>
-            <a:ext cx="291465" cy="48683"/>
+            <a:off x="152251" y="1344839"/>
+            <a:ext cx="498277" cy="77251"/>
           </a:xfrm>
           <a:prstGeom prst="rect">
             <a:avLst/>
@@ -2909,7 +3732,7 @@
           <a:bodyPr vert="horz" lIns="91440" tIns="45720" rIns="91440" bIns="45720" rtlCol="0" anchor="ctr"/>
           <a:lstStyle>
             <a:lvl1pPr algn="l">
-              <a:defRPr sz="160">
+              <a:defRPr sz="254">
                 <a:solidFill>
                   <a:schemeClr val="tx1">
                     <a:tint val="82000"/>
@@ -2921,7 +3744,7 @@
           <a:p>
             <a:fld id="{CF9FBDB8-36C6-4744-999D-C99C2C96D370}" type="datetimeFigureOut">
               <a:rPr lang="en-DE" smtClean="0"/>
-              <a:t>13.05.26</a:t>
+              <a:t>20.05.26</a:t>
             </a:fld>
             <a:endParaRPr lang="en-DE"/>
           </a:p>
@@ -2939,8 +3762,8 @@
         </p:nvSpPr>
         <p:spPr>
           <a:xfrm>
-            <a:off x="429101" y="847514"/>
-            <a:ext cx="437198" cy="48683"/>
+            <a:off x="733574" y="1344839"/>
+            <a:ext cx="747415" cy="77251"/>
           </a:xfrm>
           <a:prstGeom prst="rect">
             <a:avLst/>
@@ -2950,7 +3773,7 @@
           <a:bodyPr vert="horz" lIns="91440" tIns="45720" rIns="91440" bIns="45720" rtlCol="0" anchor="ctr"/>
           <a:lstStyle>
             <a:lvl1pPr algn="ctr">
-              <a:defRPr sz="160">
+              <a:defRPr sz="254">
                 <a:solidFill>
                   <a:schemeClr val="tx1">
                     <a:tint val="82000"/>
@@ -2976,8 +3799,8 @@
         </p:nvSpPr>
         <p:spPr>
           <a:xfrm>
-            <a:off x="914876" y="847514"/>
-            <a:ext cx="291465" cy="48683"/>
+            <a:off x="1564035" y="1344839"/>
+            <a:ext cx="498277" cy="77251"/>
           </a:xfrm>
           <a:prstGeom prst="rect">
             <a:avLst/>
@@ -2987,7 +3810,7 @@
           <a:bodyPr vert="horz" lIns="91440" tIns="45720" rIns="91440" bIns="45720" rtlCol="0" anchor="ctr"/>
           <a:lstStyle>
             <a:lvl1pPr algn="r">
-              <a:defRPr sz="160">
+              <a:defRPr sz="254">
                 <a:solidFill>
                   <a:schemeClr val="tx1">
                     <a:tint val="82000"/>
@@ -3008,27 +3831,27 @@
     </p:spTree>
     <p:extLst>
       <p:ext uri="{BB962C8B-B14F-4D97-AF65-F5344CB8AC3E}">
-        <p14:creationId xmlns:p14="http://schemas.microsoft.com/office/powerpoint/2010/main" val="894690125"/>
+        <p14:creationId xmlns:p14="http://schemas.microsoft.com/office/powerpoint/2010/main" val="3813976980"/>
       </p:ext>
     </p:extLst>
   </p:cSld>
   <p:clrMap bg1="lt1" tx1="dk1" bg2="lt2" tx2="dk2" accent1="accent1" accent2="accent2" accent3="accent3" accent4="accent4" accent5="accent5" accent6="accent6" hlink="hlink" folHlink="folHlink"/>
   <p:sldLayoutIdLst>
-    <p:sldLayoutId id="2147483817" r:id="rId1"/>
-    <p:sldLayoutId id="2147483818" r:id="rId2"/>
-    <p:sldLayoutId id="2147483819" r:id="rId3"/>
-    <p:sldLayoutId id="2147483820" r:id="rId4"/>
-    <p:sldLayoutId id="2147483821" r:id="rId5"/>
-    <p:sldLayoutId id="2147483822" r:id="rId6"/>
-    <p:sldLayoutId id="2147483823" r:id="rId7"/>
-    <p:sldLayoutId id="2147483824" r:id="rId8"/>
-    <p:sldLayoutId id="2147483825" r:id="rId9"/>
-    <p:sldLayoutId id="2147483826" r:id="rId10"/>
-    <p:sldLayoutId id="2147483827" r:id="rId11"/>
+    <p:sldLayoutId id="2147484141" r:id="rId1"/>
+    <p:sldLayoutId id="2147484142" r:id="rId2"/>
+    <p:sldLayoutId id="2147484143" r:id="rId3"/>
+    <p:sldLayoutId id="2147484144" r:id="rId4"/>
+    <p:sldLayoutId id="2147484145" r:id="rId5"/>
+    <p:sldLayoutId id="2147484146" r:id="rId6"/>
+    <p:sldLayoutId id="2147484147" r:id="rId7"/>
+    <p:sldLayoutId id="2147484148" r:id="rId8"/>
+    <p:sldLayoutId id="2147484149" r:id="rId9"/>
+    <p:sldLayoutId id="2147484150" r:id="rId10"/>
+    <p:sldLayoutId id="2147484151" r:id="rId11"/>
   </p:sldLayoutIdLst>
   <p:txStyles>
     <p:titleStyle>
-      <a:lvl1pPr algn="l" defTabSz="121890" rtl="0" eaLnBrk="1" latinLnBrk="0" hangingPunct="1">
+      <a:lvl1pPr algn="l" defTabSz="193487" rtl="0" eaLnBrk="1" latinLnBrk="0" hangingPunct="1">
         <a:lnSpc>
           <a:spcPct val="90000"/>
         </a:lnSpc>
@@ -3036,7 +3859,7 @@
           <a:spcPct val="0"/>
         </a:spcBef>
         <a:buNone/>
-        <a:defRPr sz="587" kern="1200">
+        <a:defRPr sz="931" kern="1200">
           <a:solidFill>
             <a:schemeClr val="tx1"/>
           </a:solidFill>
@@ -3047,16 +3870,16 @@
       </a:lvl1pPr>
     </p:titleStyle>
     <p:bodyStyle>
-      <a:lvl1pPr marL="30472" indent="-30472" algn="l" defTabSz="121890" rtl="0" eaLnBrk="1" latinLnBrk="0" hangingPunct="1">
+      <a:lvl1pPr marL="48372" indent="-48372" algn="l" defTabSz="193487" rtl="0" eaLnBrk="1" latinLnBrk="0" hangingPunct="1">
         <a:lnSpc>
           <a:spcPct val="90000"/>
         </a:lnSpc>
         <a:spcBef>
-          <a:spcPts val="133"/>
+          <a:spcPts val="212"/>
         </a:spcBef>
         <a:buFont typeface="Arial" panose="020B0604020202020204" pitchFamily="34" charset="0"/>
         <a:buChar char="•"/>
-        <a:defRPr sz="373" kern="1200">
+        <a:defRPr sz="592" kern="1200">
           <a:solidFill>
             <a:schemeClr val="tx1"/>
           </a:solidFill>
@@ -3065,16 +3888,16 @@
           <a:cs typeface="+mn-cs"/>
         </a:defRPr>
       </a:lvl1pPr>
-      <a:lvl2pPr marL="91417" indent="-30472" algn="l" defTabSz="121890" rtl="0" eaLnBrk="1" latinLnBrk="0" hangingPunct="1">
+      <a:lvl2pPr marL="145115" indent="-48372" algn="l" defTabSz="193487" rtl="0" eaLnBrk="1" latinLnBrk="0" hangingPunct="1">
         <a:lnSpc>
           <a:spcPct val="90000"/>
         </a:lnSpc>
         <a:spcBef>
-          <a:spcPts val="67"/>
+          <a:spcPts val="106"/>
         </a:spcBef>
         <a:buFont typeface="Arial" panose="020B0604020202020204" pitchFamily="34" charset="0"/>
         <a:buChar char="•"/>
-        <a:defRPr sz="320" kern="1200">
+        <a:defRPr sz="508" kern="1200">
           <a:solidFill>
             <a:schemeClr val="tx1"/>
           </a:solidFill>
@@ -3083,16 +3906,16 @@
           <a:cs typeface="+mn-cs"/>
         </a:defRPr>
       </a:lvl2pPr>
-      <a:lvl3pPr marL="152362" indent="-30472" algn="l" defTabSz="121890" rtl="0" eaLnBrk="1" latinLnBrk="0" hangingPunct="1">
+      <a:lvl3pPr marL="241859" indent="-48372" algn="l" defTabSz="193487" rtl="0" eaLnBrk="1" latinLnBrk="0" hangingPunct="1">
         <a:lnSpc>
           <a:spcPct val="90000"/>
         </a:lnSpc>
         <a:spcBef>
-          <a:spcPts val="67"/>
+          <a:spcPts val="106"/>
         </a:spcBef>
         <a:buFont typeface="Arial" panose="020B0604020202020204" pitchFamily="34" charset="0"/>
         <a:buChar char="•"/>
-        <a:defRPr sz="267" kern="1200">
+        <a:defRPr sz="423" kern="1200">
           <a:solidFill>
             <a:schemeClr val="tx1"/>
           </a:solidFill>
@@ -3101,16 +3924,16 @@
           <a:cs typeface="+mn-cs"/>
         </a:defRPr>
       </a:lvl3pPr>
-      <a:lvl4pPr marL="213307" indent="-30472" algn="l" defTabSz="121890" rtl="0" eaLnBrk="1" latinLnBrk="0" hangingPunct="1">
+      <a:lvl4pPr marL="338602" indent="-48372" algn="l" defTabSz="193487" rtl="0" eaLnBrk="1" latinLnBrk="0" hangingPunct="1">
         <a:lnSpc>
           <a:spcPct val="90000"/>
         </a:lnSpc>
         <a:spcBef>
-          <a:spcPts val="67"/>
+          <a:spcPts val="106"/>
         </a:spcBef>
         <a:buFont typeface="Arial" panose="020B0604020202020204" pitchFamily="34" charset="0"/>
         <a:buChar char="•"/>
-        <a:defRPr sz="240" kern="1200">
+        <a:defRPr sz="381" kern="1200">
           <a:solidFill>
             <a:schemeClr val="tx1"/>
           </a:solidFill>
@@ -3119,16 +3942,16 @@
           <a:cs typeface="+mn-cs"/>
         </a:defRPr>
       </a:lvl4pPr>
-      <a:lvl5pPr marL="274251" indent="-30472" algn="l" defTabSz="121890" rtl="0" eaLnBrk="1" latinLnBrk="0" hangingPunct="1">
+      <a:lvl5pPr marL="435346" indent="-48372" algn="l" defTabSz="193487" rtl="0" eaLnBrk="1" latinLnBrk="0" hangingPunct="1">
         <a:lnSpc>
           <a:spcPct val="90000"/>
         </a:lnSpc>
         <a:spcBef>
-          <a:spcPts val="67"/>
+          <a:spcPts val="106"/>
         </a:spcBef>
         <a:buFont typeface="Arial" panose="020B0604020202020204" pitchFamily="34" charset="0"/>
         <a:buChar char="•"/>
-        <a:defRPr sz="240" kern="1200">
+        <a:defRPr sz="381" kern="1200">
           <a:solidFill>
             <a:schemeClr val="tx1"/>
           </a:solidFill>
@@ -3137,16 +3960,16 @@
           <a:cs typeface="+mn-cs"/>
         </a:defRPr>
       </a:lvl5pPr>
-      <a:lvl6pPr marL="335196" indent="-30472" algn="l" defTabSz="121890" rtl="0" eaLnBrk="1" latinLnBrk="0" hangingPunct="1">
+      <a:lvl6pPr marL="532089" indent="-48372" algn="l" defTabSz="193487" rtl="0" eaLnBrk="1" latinLnBrk="0" hangingPunct="1">
         <a:lnSpc>
           <a:spcPct val="90000"/>
         </a:lnSpc>
         <a:spcBef>
-          <a:spcPts val="67"/>
+          <a:spcPts val="106"/>
         </a:spcBef>
         <a:buFont typeface="Arial" panose="020B0604020202020204" pitchFamily="34" charset="0"/>
         <a:buChar char="•"/>
-        <a:defRPr sz="240" kern="1200">
+        <a:defRPr sz="381" kern="1200">
           <a:solidFill>
             <a:schemeClr val="tx1"/>
           </a:solidFill>
@@ -3155,16 +3978,16 @@
           <a:cs typeface="+mn-cs"/>
         </a:defRPr>
       </a:lvl6pPr>
-      <a:lvl7pPr marL="396141" indent="-30472" algn="l" defTabSz="121890" rtl="0" eaLnBrk="1" latinLnBrk="0" hangingPunct="1">
+      <a:lvl7pPr marL="628833" indent="-48372" algn="l" defTabSz="193487" rtl="0" eaLnBrk="1" latinLnBrk="0" hangingPunct="1">
         <a:lnSpc>
           <a:spcPct val="90000"/>
         </a:lnSpc>
         <a:spcBef>
-          <a:spcPts val="67"/>
+          <a:spcPts val="106"/>
         </a:spcBef>
         <a:buFont typeface="Arial" panose="020B0604020202020204" pitchFamily="34" charset="0"/>
         <a:buChar char="•"/>
-        <a:defRPr sz="240" kern="1200">
+        <a:defRPr sz="381" kern="1200">
           <a:solidFill>
             <a:schemeClr val="tx1"/>
           </a:solidFill>
@@ -3173,16 +3996,16 @@
           <a:cs typeface="+mn-cs"/>
         </a:defRPr>
       </a:lvl7pPr>
-      <a:lvl8pPr marL="457086" indent="-30472" algn="l" defTabSz="121890" rtl="0" eaLnBrk="1" latinLnBrk="0" hangingPunct="1">
+      <a:lvl8pPr marL="725576" indent="-48372" algn="l" defTabSz="193487" rtl="0" eaLnBrk="1" latinLnBrk="0" hangingPunct="1">
         <a:lnSpc>
           <a:spcPct val="90000"/>
         </a:lnSpc>
         <a:spcBef>
-          <a:spcPts val="67"/>
+          <a:spcPts val="106"/>
         </a:spcBef>
         <a:buFont typeface="Arial" panose="020B0604020202020204" pitchFamily="34" charset="0"/>
         <a:buChar char="•"/>
-        <a:defRPr sz="240" kern="1200">
+        <a:defRPr sz="381" kern="1200">
           <a:solidFill>
             <a:schemeClr val="tx1"/>
           </a:solidFill>
@@ -3191,16 +4014,16 @@
           <a:cs typeface="+mn-cs"/>
         </a:defRPr>
       </a:lvl8pPr>
-      <a:lvl9pPr marL="518030" indent="-30472" algn="l" defTabSz="121890" rtl="0" eaLnBrk="1" latinLnBrk="0" hangingPunct="1">
+      <a:lvl9pPr marL="822320" indent="-48372" algn="l" defTabSz="193487" rtl="0" eaLnBrk="1" latinLnBrk="0" hangingPunct="1">
         <a:lnSpc>
           <a:spcPct val="90000"/>
         </a:lnSpc>
         <a:spcBef>
-          <a:spcPts val="67"/>
+          <a:spcPts val="106"/>
         </a:spcBef>
         <a:buFont typeface="Arial" panose="020B0604020202020204" pitchFamily="34" charset="0"/>
         <a:buChar char="•"/>
-        <a:defRPr sz="240" kern="1200">
+        <a:defRPr sz="381" kern="1200">
           <a:solidFill>
             <a:schemeClr val="tx1"/>
           </a:solidFill>
@@ -3214,8 +4037,8 @@
       <a:defPPr>
         <a:defRPr lang="en-US"/>
       </a:defPPr>
-      <a:lvl1pPr marL="0" algn="l" defTabSz="121890" rtl="0" eaLnBrk="1" latinLnBrk="0" hangingPunct="1">
-        <a:defRPr sz="240" kern="1200">
+      <a:lvl1pPr marL="0" algn="l" defTabSz="193487" rtl="0" eaLnBrk="1" latinLnBrk="0" hangingPunct="1">
+        <a:defRPr sz="381" kern="1200">
           <a:solidFill>
             <a:schemeClr val="tx1"/>
           </a:solidFill>
@@ -3224,8 +4047,8 @@
           <a:cs typeface="+mn-cs"/>
         </a:defRPr>
       </a:lvl1pPr>
-      <a:lvl2pPr marL="60945" algn="l" defTabSz="121890" rtl="0" eaLnBrk="1" latinLnBrk="0" hangingPunct="1">
-        <a:defRPr sz="240" kern="1200">
+      <a:lvl2pPr marL="96744" algn="l" defTabSz="193487" rtl="0" eaLnBrk="1" latinLnBrk="0" hangingPunct="1">
+        <a:defRPr sz="381" kern="1200">
           <a:solidFill>
             <a:schemeClr val="tx1"/>
           </a:solidFill>
@@ -3234,8 +4057,8 @@
           <a:cs typeface="+mn-cs"/>
         </a:defRPr>
       </a:lvl2pPr>
-      <a:lvl3pPr marL="121890" algn="l" defTabSz="121890" rtl="0" eaLnBrk="1" latinLnBrk="0" hangingPunct="1">
-        <a:defRPr sz="240" kern="1200">
+      <a:lvl3pPr marL="193487" algn="l" defTabSz="193487" rtl="0" eaLnBrk="1" latinLnBrk="0" hangingPunct="1">
+        <a:defRPr sz="381" kern="1200">
           <a:solidFill>
             <a:schemeClr val="tx1"/>
           </a:solidFill>
@@ -3244,8 +4067,8 @@
           <a:cs typeface="+mn-cs"/>
         </a:defRPr>
       </a:lvl3pPr>
-      <a:lvl4pPr marL="182834" algn="l" defTabSz="121890" rtl="0" eaLnBrk="1" latinLnBrk="0" hangingPunct="1">
-        <a:defRPr sz="240" kern="1200">
+      <a:lvl4pPr marL="290231" algn="l" defTabSz="193487" rtl="0" eaLnBrk="1" latinLnBrk="0" hangingPunct="1">
+        <a:defRPr sz="381" kern="1200">
           <a:solidFill>
             <a:schemeClr val="tx1"/>
           </a:solidFill>
@@ -3254,8 +4077,8 @@
           <a:cs typeface="+mn-cs"/>
         </a:defRPr>
       </a:lvl4pPr>
-      <a:lvl5pPr marL="243779" algn="l" defTabSz="121890" rtl="0" eaLnBrk="1" latinLnBrk="0" hangingPunct="1">
-        <a:defRPr sz="240" kern="1200">
+      <a:lvl5pPr marL="386974" algn="l" defTabSz="193487" rtl="0" eaLnBrk="1" latinLnBrk="0" hangingPunct="1">
+        <a:defRPr sz="381" kern="1200">
           <a:solidFill>
             <a:schemeClr val="tx1"/>
           </a:solidFill>
@@ -3264,8 +4087,8 @@
           <a:cs typeface="+mn-cs"/>
         </a:defRPr>
       </a:lvl5pPr>
-      <a:lvl6pPr marL="304724" algn="l" defTabSz="121890" rtl="0" eaLnBrk="1" latinLnBrk="0" hangingPunct="1">
-        <a:defRPr sz="240" kern="1200">
+      <a:lvl6pPr marL="483718" algn="l" defTabSz="193487" rtl="0" eaLnBrk="1" latinLnBrk="0" hangingPunct="1">
+        <a:defRPr sz="381" kern="1200">
           <a:solidFill>
             <a:schemeClr val="tx1"/>
           </a:solidFill>
@@ -3274,8 +4097,8 @@
           <a:cs typeface="+mn-cs"/>
         </a:defRPr>
       </a:lvl6pPr>
-      <a:lvl7pPr marL="365669" algn="l" defTabSz="121890" rtl="0" eaLnBrk="1" latinLnBrk="0" hangingPunct="1">
-        <a:defRPr sz="240" kern="1200">
+      <a:lvl7pPr marL="580461" algn="l" defTabSz="193487" rtl="0" eaLnBrk="1" latinLnBrk="0" hangingPunct="1">
+        <a:defRPr sz="381" kern="1200">
           <a:solidFill>
             <a:schemeClr val="tx1"/>
           </a:solidFill>
@@ -3284,8 +4107,8 @@
           <a:cs typeface="+mn-cs"/>
         </a:defRPr>
       </a:lvl7pPr>
-      <a:lvl8pPr marL="426613" algn="l" defTabSz="121890" rtl="0" eaLnBrk="1" latinLnBrk="0" hangingPunct="1">
-        <a:defRPr sz="240" kern="1200">
+      <a:lvl8pPr marL="677205" algn="l" defTabSz="193487" rtl="0" eaLnBrk="1" latinLnBrk="0" hangingPunct="1">
+        <a:defRPr sz="381" kern="1200">
           <a:solidFill>
             <a:schemeClr val="tx1"/>
           </a:solidFill>
@@ -3294,8 +4117,8 @@
           <a:cs typeface="+mn-cs"/>
         </a:defRPr>
       </a:lvl8pPr>
-      <a:lvl9pPr marL="487558" algn="l" defTabSz="121890" rtl="0" eaLnBrk="1" latinLnBrk="0" hangingPunct="1">
-        <a:defRPr sz="240" kern="1200">
+      <a:lvl9pPr marL="773948" algn="l" defTabSz="193487" rtl="0" eaLnBrk="1" latinLnBrk="0" hangingPunct="1">
+        <a:defRPr sz="381" kern="1200">
           <a:solidFill>
             <a:schemeClr val="tx1"/>
           </a:solidFill>
@@ -3328,40 +4151,10 @@
       </p:grpSpPr>
       <p:pic>
         <p:nvPicPr>
-          <p:cNvPr id="8" name="Picture 7">
+          <p:cNvPr id="13" name="Picture 12">
             <a:extLst>
               <a:ext uri="{FF2B5EF4-FFF2-40B4-BE49-F238E27FC236}">
-                <a16:creationId xmlns:a16="http://schemas.microsoft.com/office/drawing/2014/main" id="{08398859-2EFF-5E08-FE4A-F1F051537F94}"/>
-              </a:ext>
-            </a:extLst>
-          </p:cNvPr>
-          <p:cNvPicPr>
-            <a:picLocks noChangeAspect="1"/>
-          </p:cNvPicPr>
-          <p:nvPr/>
-        </p:nvPicPr>
-        <p:blipFill>
-          <a:blip r:embed="rId2"/>
-          <a:stretch>
-            <a:fillRect/>
-          </a:stretch>
-        </p:blipFill>
-        <p:spPr>
-          <a:xfrm>
-            <a:off x="0" y="11754"/>
-            <a:ext cx="989046" cy="479000"/>
-          </a:xfrm>
-          <a:prstGeom prst="rect">
-            <a:avLst/>
-          </a:prstGeom>
-        </p:spPr>
-      </p:pic>
-      <p:pic>
-        <p:nvPicPr>
-          <p:cNvPr id="9" name="Picture 8">
-            <a:extLst>
-              <a:ext uri="{FF2B5EF4-FFF2-40B4-BE49-F238E27FC236}">
-                <a16:creationId xmlns:a16="http://schemas.microsoft.com/office/drawing/2014/main" id="{B0F136FC-B030-F70C-BDD2-B6867470519E}"/>
+                <a16:creationId xmlns:a16="http://schemas.microsoft.com/office/drawing/2014/main" id="{376A7355-BE7B-9518-8A2D-2335E76982E1}"/>
               </a:ext>
             </a:extLst>
           </p:cNvPr>
@@ -3378,8 +4171,8 @@
         </p:blipFill>
         <p:spPr>
           <a:xfrm>
-            <a:off x="165095" y="494803"/>
-            <a:ext cx="1028254" cy="411301"/>
+            <a:off x="1130806" y="-4952"/>
+            <a:ext cx="543013" cy="525968"/>
           </a:xfrm>
           <a:prstGeom prst="rect">
             <a:avLst/>
@@ -3388,10 +4181,10 @@
       </p:pic>
       <p:pic>
         <p:nvPicPr>
-          <p:cNvPr id="10" name="Picture 9">
+          <p:cNvPr id="15" name="Picture 14">
             <a:extLst>
               <a:ext uri="{FF2B5EF4-FFF2-40B4-BE49-F238E27FC236}">
-                <a16:creationId xmlns:a16="http://schemas.microsoft.com/office/drawing/2014/main" id="{F44B8CB6-A794-6BD4-121F-954D1E832040}"/>
+                <a16:creationId xmlns:a16="http://schemas.microsoft.com/office/drawing/2014/main" id="{98D5BB11-788D-611F-EA96-AF12412D88C5}"/>
               </a:ext>
             </a:extLst>
           </p:cNvPr>
@@ -3408,20 +4201,140 @@
         </p:blipFill>
         <p:spPr>
           <a:xfrm>
-            <a:off x="977901" y="8769"/>
-            <a:ext cx="320217" cy="480326"/>
+            <a:off x="1665422" y="0"/>
+            <a:ext cx="540166" cy="523210"/>
           </a:xfrm>
           <a:prstGeom prst="rect">
             <a:avLst/>
           </a:prstGeom>
         </p:spPr>
       </p:pic>
-      <p:sp>
-        <p:nvSpPr>
-          <p:cNvPr id="11" name="TextBox 10">
+      <p:pic>
+        <p:nvPicPr>
+          <p:cNvPr id="7" name="Picture 6">
             <a:extLst>
               <a:ext uri="{FF2B5EF4-FFF2-40B4-BE49-F238E27FC236}">
-                <a16:creationId xmlns:a16="http://schemas.microsoft.com/office/drawing/2014/main" id="{553A4A00-B1D7-49CA-3BA7-A9949C7B9DED}"/>
+                <a16:creationId xmlns:a16="http://schemas.microsoft.com/office/drawing/2014/main" id="{F47F7974-DA38-01FC-ECF2-192F9ED98609}"/>
+              </a:ext>
+            </a:extLst>
+          </p:cNvPr>
+          <p:cNvPicPr>
+            <a:picLocks noChangeAspect="1"/>
+          </p:cNvPicPr>
+          <p:nvPr/>
+        </p:nvPicPr>
+        <p:blipFill>
+          <a:blip r:embed="rId5"/>
+          <a:stretch>
+            <a:fillRect/>
+          </a:stretch>
+        </p:blipFill>
+        <p:spPr>
+          <a:xfrm>
+            <a:off x="8975" y="499831"/>
+            <a:ext cx="537164" cy="520302"/>
+          </a:xfrm>
+          <a:prstGeom prst="rect">
+            <a:avLst/>
+          </a:prstGeom>
+        </p:spPr>
+      </p:pic>
+      <p:pic>
+        <p:nvPicPr>
+          <p:cNvPr id="3" name="Picture 2">
+            <a:extLst>
+              <a:ext uri="{FF2B5EF4-FFF2-40B4-BE49-F238E27FC236}">
+                <a16:creationId xmlns:a16="http://schemas.microsoft.com/office/drawing/2014/main" id="{AFB9AA9B-4456-D970-6CA8-7C8D8DE42AD1}"/>
+              </a:ext>
+            </a:extLst>
+          </p:cNvPr>
+          <p:cNvPicPr>
+            <a:picLocks noChangeAspect="1"/>
+          </p:cNvPicPr>
+          <p:nvPr/>
+        </p:nvPicPr>
+        <p:blipFill>
+          <a:blip r:embed="rId6"/>
+          <a:stretch>
+            <a:fillRect/>
+          </a:stretch>
+        </p:blipFill>
+        <p:spPr>
+          <a:xfrm>
+            <a:off x="1134295" y="504148"/>
+            <a:ext cx="543014" cy="525969"/>
+          </a:xfrm>
+          <a:prstGeom prst="rect">
+            <a:avLst/>
+          </a:prstGeom>
+        </p:spPr>
+      </p:pic>
+      <p:pic>
+        <p:nvPicPr>
+          <p:cNvPr id="152" name="Picture 151">
+            <a:extLst>
+              <a:ext uri="{FF2B5EF4-FFF2-40B4-BE49-F238E27FC236}">
+                <a16:creationId xmlns:a16="http://schemas.microsoft.com/office/drawing/2014/main" id="{A6891006-1491-84A7-929E-7FE39540690B}"/>
+              </a:ext>
+            </a:extLst>
+          </p:cNvPr>
+          <p:cNvPicPr>
+            <a:picLocks noChangeAspect="1"/>
+          </p:cNvPicPr>
+          <p:nvPr/>
+        </p:nvPicPr>
+        <p:blipFill>
+          <a:blip r:embed="rId7"/>
+          <a:stretch>
+            <a:fillRect/>
+          </a:stretch>
+        </p:blipFill>
+        <p:spPr>
+          <a:xfrm>
+            <a:off x="32529" y="1"/>
+            <a:ext cx="1082964" cy="499830"/>
+          </a:xfrm>
+          <a:prstGeom prst="rect">
+            <a:avLst/>
+          </a:prstGeom>
+        </p:spPr>
+      </p:pic>
+      <p:pic>
+        <p:nvPicPr>
+          <p:cNvPr id="159" name="Picture 158">
+            <a:extLst>
+              <a:ext uri="{FF2B5EF4-FFF2-40B4-BE49-F238E27FC236}">
+                <a16:creationId xmlns:a16="http://schemas.microsoft.com/office/drawing/2014/main" id="{BC9A7AF2-9906-DC2C-7EC7-9B5037AB8C87}"/>
+              </a:ext>
+            </a:extLst>
+          </p:cNvPr>
+          <p:cNvPicPr>
+            <a:picLocks noChangeAspect="1"/>
+          </p:cNvPicPr>
+          <p:nvPr/>
+        </p:nvPicPr>
+        <p:blipFill>
+          <a:blip r:embed="rId8"/>
+          <a:stretch>
+            <a:fillRect/>
+          </a:stretch>
+        </p:blipFill>
+        <p:spPr>
+          <a:xfrm>
+            <a:off x="-125" y="1046269"/>
+            <a:ext cx="945863" cy="394795"/>
+          </a:xfrm>
+          <a:prstGeom prst="rect">
+            <a:avLst/>
+          </a:prstGeom>
+        </p:spPr>
+      </p:pic>
+      <p:sp>
+        <p:nvSpPr>
+          <p:cNvPr id="160" name="TextBox 159">
+            <a:extLst>
+              <a:ext uri="{FF2B5EF4-FFF2-40B4-BE49-F238E27FC236}">
+                <a16:creationId xmlns:a16="http://schemas.microsoft.com/office/drawing/2014/main" id="{B019D59C-70B7-6851-9188-57273DDC6EE0}"/>
               </a:ext>
             </a:extLst>
           </p:cNvPr>
@@ -3430,8 +4343,8 @@
         </p:nvSpPr>
         <p:spPr>
           <a:xfrm>
-            <a:off x="-47625" y="-32493"/>
-            <a:ext cx="228600" cy="153888"/>
+            <a:off x="-28405" y="-40831"/>
+            <a:ext cx="73501" cy="153889"/>
           </a:xfrm>
           <a:prstGeom prst="rect">
             <a:avLst/>
@@ -3453,10 +4366,10 @@
       </p:sp>
       <p:sp>
         <p:nvSpPr>
-          <p:cNvPr id="12" name="TextBox 11">
+          <p:cNvPr id="161" name="TextBox 160">
             <a:extLst>
               <a:ext uri="{FF2B5EF4-FFF2-40B4-BE49-F238E27FC236}">
-                <a16:creationId xmlns:a16="http://schemas.microsoft.com/office/drawing/2014/main" id="{1D24F2F2-3BD2-8733-33BF-20E7E90F1438}"/>
+                <a16:creationId xmlns:a16="http://schemas.microsoft.com/office/drawing/2014/main" id="{1B02D681-18C0-9A74-DCF3-77FFB93AE644}"/>
               </a:ext>
             </a:extLst>
           </p:cNvPr>
@@ -3465,8 +4378,8 @@
         </p:nvSpPr>
         <p:spPr>
           <a:xfrm>
-            <a:off x="95697" y="441093"/>
-            <a:ext cx="228600" cy="153888"/>
+            <a:off x="-24849" y="453370"/>
+            <a:ext cx="73501" cy="153888"/>
           </a:xfrm>
           <a:prstGeom prst="rect">
             <a:avLst/>
@@ -3488,10 +4401,10 @@
       </p:sp>
       <p:sp>
         <p:nvSpPr>
-          <p:cNvPr id="13" name="TextBox 12">
+          <p:cNvPr id="162" name="TextBox 161">
             <a:extLst>
               <a:ext uri="{FF2B5EF4-FFF2-40B4-BE49-F238E27FC236}">
-                <a16:creationId xmlns:a16="http://schemas.microsoft.com/office/drawing/2014/main" id="{7DD5E48D-1B17-9081-2464-00D87AB1C2F9}"/>
+                <a16:creationId xmlns:a16="http://schemas.microsoft.com/office/drawing/2014/main" id="{485C0675-981C-5677-12D6-BD41D7B1978F}"/>
               </a:ext>
             </a:extLst>
           </p:cNvPr>
@@ -3500,8 +4413,8 @@
         </p:nvSpPr>
         <p:spPr>
           <a:xfrm>
-            <a:off x="883304" y="-47619"/>
-            <a:ext cx="228600" cy="153888"/>
+            <a:off x="-28405" y="969324"/>
+            <a:ext cx="73501" cy="153888"/>
           </a:xfrm>
           <a:prstGeom prst="rect">
             <a:avLst/>
@@ -3516,15 +4429,275 @@
           <a:p>
             <a:r>
               <a:rPr lang="en-DE" sz="400" b="1" dirty="0"/>
+              <a:t>E</a:t>
+            </a:r>
+          </a:p>
+        </p:txBody>
+      </p:sp>
+      <p:sp>
+        <p:nvSpPr>
+          <p:cNvPr id="163" name="TextBox 162">
+            <a:extLst>
+              <a:ext uri="{FF2B5EF4-FFF2-40B4-BE49-F238E27FC236}">
+                <a16:creationId xmlns:a16="http://schemas.microsoft.com/office/drawing/2014/main" id="{49A5B2FA-01BF-8544-6582-489966984716}"/>
+              </a:ext>
+            </a:extLst>
+          </p:cNvPr>
+          <p:cNvSpPr txBox="1"/>
+          <p:nvPr/>
+        </p:nvSpPr>
+        <p:spPr>
+          <a:xfrm>
+            <a:off x="1542968" y="969323"/>
+            <a:ext cx="73501" cy="153888"/>
+          </a:xfrm>
+          <a:prstGeom prst="rect">
+            <a:avLst/>
+          </a:prstGeom>
+          <a:noFill/>
+        </p:spPr>
+        <p:txBody>
+          <a:bodyPr wrap="square" rtlCol="0">
+            <a:spAutoFit/>
+          </a:bodyPr>
+          <a:lstStyle/>
+          <a:p>
+            <a:r>
+              <a:rPr lang="en-DE" sz="400" b="1" dirty="0"/>
+              <a:t>G</a:t>
+            </a:r>
+          </a:p>
+        </p:txBody>
+      </p:sp>
+      <p:sp>
+        <p:nvSpPr>
+          <p:cNvPr id="164" name="TextBox 163">
+            <a:extLst>
+              <a:ext uri="{FF2B5EF4-FFF2-40B4-BE49-F238E27FC236}">
+                <a16:creationId xmlns:a16="http://schemas.microsoft.com/office/drawing/2014/main" id="{281842AD-1360-3431-57F3-6EC6F15EA128}"/>
+              </a:ext>
+            </a:extLst>
+          </p:cNvPr>
+          <p:cNvSpPr txBox="1"/>
+          <p:nvPr/>
+        </p:nvSpPr>
+        <p:spPr>
+          <a:xfrm>
+            <a:off x="942000" y="969323"/>
+            <a:ext cx="73501" cy="153889"/>
+          </a:xfrm>
+          <a:prstGeom prst="rect">
+            <a:avLst/>
+          </a:prstGeom>
+          <a:noFill/>
+        </p:spPr>
+        <p:txBody>
+          <a:bodyPr wrap="square" rtlCol="0">
+            <a:spAutoFit/>
+          </a:bodyPr>
+          <a:lstStyle/>
+          <a:p>
+            <a:r>
+              <a:rPr lang="en-DE" sz="400" b="1" dirty="0"/>
+              <a:t>F</a:t>
+            </a:r>
+          </a:p>
+        </p:txBody>
+      </p:sp>
+      <p:pic>
+        <p:nvPicPr>
+          <p:cNvPr id="165" name="Picture 164">
+            <a:extLst>
+              <a:ext uri="{FF2B5EF4-FFF2-40B4-BE49-F238E27FC236}">
+                <a16:creationId xmlns:a16="http://schemas.microsoft.com/office/drawing/2014/main" id="{5A17BDA0-44D1-6CDB-D819-7849C7906D3A}"/>
+              </a:ext>
+            </a:extLst>
+          </p:cNvPr>
+          <p:cNvPicPr>
+            <a:picLocks noChangeAspect="1"/>
+          </p:cNvPicPr>
+          <p:nvPr/>
+        </p:nvPicPr>
+        <p:blipFill>
+          <a:blip r:embed="rId9"/>
+          <a:stretch>
+            <a:fillRect/>
+          </a:stretch>
+        </p:blipFill>
+        <p:spPr>
+          <a:xfrm>
+            <a:off x="968242" y="1031930"/>
+            <a:ext cx="636745" cy="424496"/>
+          </a:xfrm>
+          <a:prstGeom prst="rect">
+            <a:avLst/>
+          </a:prstGeom>
+        </p:spPr>
+      </p:pic>
+      <p:pic>
+        <p:nvPicPr>
+          <p:cNvPr id="166" name="Picture 165">
+            <a:extLst>
+              <a:ext uri="{FF2B5EF4-FFF2-40B4-BE49-F238E27FC236}">
+                <a16:creationId xmlns:a16="http://schemas.microsoft.com/office/drawing/2014/main" id="{FA3F28EE-8814-582F-FE7F-DF300382C86B}"/>
+              </a:ext>
+            </a:extLst>
+          </p:cNvPr>
+          <p:cNvPicPr>
+            <a:picLocks noChangeAspect="1"/>
+          </p:cNvPicPr>
+          <p:nvPr/>
+        </p:nvPicPr>
+        <p:blipFill>
+          <a:blip r:embed="rId10"/>
+          <a:stretch>
+            <a:fillRect/>
+          </a:stretch>
+        </p:blipFill>
+        <p:spPr>
+          <a:xfrm>
+            <a:off x="1590329" y="1035228"/>
+            <a:ext cx="631796" cy="421198"/>
+          </a:xfrm>
+          <a:prstGeom prst="rect">
+            <a:avLst/>
+          </a:prstGeom>
+        </p:spPr>
+      </p:pic>
+      <p:sp>
+        <p:nvSpPr>
+          <p:cNvPr id="167" name="TextBox 166">
+            <a:extLst>
+              <a:ext uri="{FF2B5EF4-FFF2-40B4-BE49-F238E27FC236}">
+                <a16:creationId xmlns:a16="http://schemas.microsoft.com/office/drawing/2014/main" id="{99EABC2C-0A25-ED72-0759-D658A8A08CFC}"/>
+              </a:ext>
+            </a:extLst>
+          </p:cNvPr>
+          <p:cNvSpPr txBox="1"/>
+          <p:nvPr/>
+        </p:nvSpPr>
+        <p:spPr>
+          <a:xfrm>
+            <a:off x="1083055" y="-40830"/>
+            <a:ext cx="73501" cy="153888"/>
+          </a:xfrm>
+          <a:prstGeom prst="rect">
+            <a:avLst/>
+          </a:prstGeom>
+          <a:noFill/>
+        </p:spPr>
+        <p:txBody>
+          <a:bodyPr wrap="square" rtlCol="0">
+            <a:spAutoFit/>
+          </a:bodyPr>
+          <a:lstStyle/>
+          <a:p>
+            <a:r>
+              <a:rPr lang="en-DE" sz="400" b="1" dirty="0"/>
               <a:t>B</a:t>
             </a:r>
           </a:p>
         </p:txBody>
       </p:sp>
+      <p:sp>
+        <p:nvSpPr>
+          <p:cNvPr id="168" name="TextBox 167">
+            <a:extLst>
+              <a:ext uri="{FF2B5EF4-FFF2-40B4-BE49-F238E27FC236}">
+                <a16:creationId xmlns:a16="http://schemas.microsoft.com/office/drawing/2014/main" id="{3F333D7D-4924-9166-8A15-8F4AD533EAEE}"/>
+              </a:ext>
+            </a:extLst>
+          </p:cNvPr>
+          <p:cNvSpPr txBox="1"/>
+          <p:nvPr/>
+        </p:nvSpPr>
+        <p:spPr>
+          <a:xfrm>
+            <a:off x="1081464" y="463503"/>
+            <a:ext cx="73501" cy="153889"/>
+          </a:xfrm>
+          <a:prstGeom prst="rect">
+            <a:avLst/>
+          </a:prstGeom>
+          <a:noFill/>
+        </p:spPr>
+        <p:txBody>
+          <a:bodyPr wrap="square" rtlCol="0">
+            <a:spAutoFit/>
+          </a:bodyPr>
+          <a:lstStyle/>
+          <a:p>
+            <a:r>
+              <a:rPr lang="en-DE" sz="400" b="1" dirty="0"/>
+              <a:t>D</a:t>
+            </a:r>
+          </a:p>
+        </p:txBody>
+      </p:sp>
+      <p:pic>
+        <p:nvPicPr>
+          <p:cNvPr id="5" name="Picture 4">
+            <a:extLst>
+              <a:ext uri="{FF2B5EF4-FFF2-40B4-BE49-F238E27FC236}">
+                <a16:creationId xmlns:a16="http://schemas.microsoft.com/office/drawing/2014/main" id="{CE32715A-C079-24A6-B629-8694A9D85283}"/>
+              </a:ext>
+            </a:extLst>
+          </p:cNvPr>
+          <p:cNvPicPr>
+            <a:picLocks noChangeAspect="1"/>
+          </p:cNvPicPr>
+          <p:nvPr/>
+        </p:nvPicPr>
+        <p:blipFill>
+          <a:blip r:embed="rId11"/>
+          <a:stretch>
+            <a:fillRect/>
+          </a:stretch>
+        </p:blipFill>
+        <p:spPr>
+          <a:xfrm>
+            <a:off x="1668774" y="501460"/>
+            <a:ext cx="545789" cy="528657"/>
+          </a:xfrm>
+          <a:prstGeom prst="rect">
+            <a:avLst/>
+          </a:prstGeom>
+        </p:spPr>
+      </p:pic>
+      <p:pic>
+        <p:nvPicPr>
+          <p:cNvPr id="9" name="Picture 8">
+            <a:extLst>
+              <a:ext uri="{FF2B5EF4-FFF2-40B4-BE49-F238E27FC236}">
+                <a16:creationId xmlns:a16="http://schemas.microsoft.com/office/drawing/2014/main" id="{E7CDE2E6-68E3-EB8E-8411-4A631CE65DE1}"/>
+              </a:ext>
+            </a:extLst>
+          </p:cNvPr>
+          <p:cNvPicPr>
+            <a:picLocks noChangeAspect="1"/>
+          </p:cNvPicPr>
+          <p:nvPr/>
+        </p:nvPicPr>
+        <p:blipFill>
+          <a:blip r:embed="rId12"/>
+          <a:stretch>
+            <a:fillRect/>
+          </a:stretch>
+        </p:blipFill>
+        <p:spPr>
+          <a:xfrm>
+            <a:off x="540744" y="499830"/>
+            <a:ext cx="537164" cy="520303"/>
+          </a:xfrm>
+          <a:prstGeom prst="rect">
+            <a:avLst/>
+          </a:prstGeom>
+        </p:spPr>
+      </p:pic>
     </p:spTree>
     <p:extLst>
       <p:ext uri="{BB962C8B-B14F-4D97-AF65-F5344CB8AC3E}">
-        <p14:creationId xmlns:p14="http://schemas.microsoft.com/office/powerpoint/2010/main" val="1064014603"/>
+        <p14:creationId xmlns:p14="http://schemas.microsoft.com/office/powerpoint/2010/main" val="1135184855"/>
       </p:ext>
     </p:extLst>
   </p:cSld>
